--- a/presentation/Wind_Power_Plant_20min.pptx
+++ b/presentation/Wind_Power_Plant_20min.pptx
@@ -845,7 +845,7 @@
           </a:p>
           <a:p>
             <a:r>
-              <a:t>Hornsea Two is a useful real-world example of an offshore wind power plant in the United Kingdom. The developer reports that the project became fully operational in twenty-twenty-two. It uses one hundred and sixty-five turbines rated at eight megawatts each. Multiplying those numbers gives one thousand three hundred and twenty megawatts, commonly described as approximately one point three gigawatts. That is the rated capacity of the turbines, not a guarantee of continuous output. The simplified diagram shows the functional arrangement rather than the actual engineering design. Turbines feed a collection network. Offshore electrical infrastructure combines their output, and export cables carry electricity toward the onshore grid connection. This arrangement demonstrates why offshore wind is a complete plant-design problem. Engineers need reliable marine foundations, cable systems, protection, communication, and maintenance access. Strong wind resources and large turbines create an opportunity for substantial energy production, but the project also faces weather constraints, demanding installation conditions, and expensive repairs. The case links our earlier topics together: aerodynamic conversion takes place at each turbine, while electrical coordination and grid integration take place across the whole wind farm. We do not estimate Hornsea Two’s annual generation here because that would require a project-specific production figure or an explicitly justified capacity factor.</a:t>
+              <a:t>Hornsea Two is a real offshore wind power plant in the United Kingdom. On the map, locate Great Britain and the Yorkshire coast, then follow the arrow toward the offshore project area in the North Sea. The coastline is based on Natural Earth geographic data; the project marker is approximate, rather than an exact site boundary. The developer reports that Hornsea Two became fully operational in twenty-twenty-two. It has one hundred and sixty-five turbines rated at eight megawatts each. Together, that is one thousand three hundred and twenty megawatts, or approximately one point three gigawatts of rated capacity. Turbines feed a collection network and substations, and export cables carry electricity toward the onshore grid. The offshore setting offers an opportunity to use a strong wind resource and large turbines, but it also requires marine foundations, reliable subsea cables, and maintenance access in difficult weather. This example connects our earlier topics: energy conversion happens at each turbine, while electrical coordination happens across the wind farm. The one point three gigawatts is a rating, not continuous production or an annual energy figure.</a:t>
             </a:r>
           </a:p>
           <a:p/>
@@ -856,7 +856,7 @@
           </a:p>
           <a:p>
             <a:r>
-              <a:t>英国Hornsea 2案例：2022全面投运、165台×8MW=1320MW。图为原创简化示意，不是官方地理或工程接线图。不把额定容量当全年输出，不标“全球最大”以免过时。</a:t>
+              <a:t>先指位置图：英国约克郡海岸以东的北海海上风场。底图来自Natural Earth公开地理数据；风场标记仅代表大致位置，不是经核验的准确项目边界。再讲2022全面投运、165台×8MW≈1.3GW，以及海底电缆、变电站和维护难点。额定容量不等于持续输出或年发电量。</a:t>
             </a:r>
           </a:p>
           <a:p/>
@@ -873,6 +873,11 @@
           <a:p>
             <a:r>
               <a:t>R3: Burton, T., Jenkins, N., Sharpe, D., &amp; Bossanyi, E. (2011). Wind Energy Handbook (2nd ed.). Wiley. https://doi.org/10.1002/9781119992714</a:t>
+            </a:r>
+          </a:p>
+          <a:p>
+            <a:r>
+              <a:t>R8: Natural Earth. Admin 0 – Countries, 1:50m (public-domain geographic data). https://github.com/nvkelso/natural-earth-vector</a:t>
             </a:r>
           </a:p>
         </p:txBody>
@@ -1168,7 +1173,7 @@
           <a:lstStyle/>
           <a:p>
             <a:r>
-              <a:t>Reference slides are not part of the 20-minute talk. External source websites were blocked by the environment network policy, so links were not independently opened here. No direct quotations or claims of online verification are made. Course-slide page numbers are PDF page numbers.</a:t>
+              <a:t>Reference slides are not part of the 20-minute talk. Natural Earth map data (R8) was downloaded and verified. Energy-source websites (R1–R7) remain blocked by the environment network policy; no claims of online verification are made for them. The offshore marker is an approximate teaching annotation, not a verified project boundary. Course-slide page numbers are PDF page numbers.</a:t>
             </a:r>
           </a:p>
         </p:txBody>
@@ -1238,7 +1243,7 @@
           <a:lstStyle/>
           <a:p>
             <a:r>
-              <a:t>Reference slides are not part of the 20-minute talk. External source websites were blocked by the environment network policy, so links were not independently opened here. No direct quotations or claims of online verification are made. Course-slide page numbers are PDF page numbers.</a:t>
+              <a:t>Reference slides are not part of the 20-minute talk. Natural Earth map data (R8) was downloaded and verified. Energy-source websites (R1–R7) remain blocked by the environment network policy; no claims of online verification are made for them. The offshore marker is an approximate teaching annotation, not a verified project boundary. Course-slide page numbers are PDF page numbers.</a:t>
             </a:r>
           </a:p>
         </p:txBody>
@@ -1853,7 +1858,7 @@
           </a:p>
           <a:p>
             <a:r>
-              <a:t>Three control functions are particularly important. Yaw control turns the nacelle so that the rotor faces the wind direction. Pitch control changes the angle of the blades, affecting aerodynamic forces and the amount of power extracted. Generator torque and speed control help maintain efficient operation below rated power. As wind speed increases toward and beyond the rated operating point, pitch control limits aerodynamic power and helps manage structural loads. At very high winds, the turbine may shut down for safety. Exact operating thresholds depend on the turbine model; there is no single universal cut-out speed for every machine. The plant controller adds another layer. It can coordinate active-power limits, reactive-power commands, and turbine operation across the farm. These controls therefore serve two purposes: capture useful energy when conditions allow, and protect the equipment when conditions become demanding. The same hardware also helps explain why wind turbines can contribute to grid support, which my partner will discuss later.</a:t>
+              <a:t>This curve shows why turbine output does not keep increasing as wind speed cubed. It is a teaching example, with cut-in at three metres per second, rated operation at twelve, and shutdown at twenty-five. Actual thresholds and storm controls vary by turbine. Below cut-in, the machine does not generate. Between cut-in and the rated point, output increases, and torque or speed control helps capture energy efficiently. Above the rated point, blade-pitch control limits power and structural loading, so the curve levels off. At the high-wind limit shown here, protection stops generation. Yaw control has a different role: it aligns the rotor with the wind direction. Follow the rising section, the plateau, and the shutdown step on the graph. The important message is that aerodynamics, rated capacity, and control limits determine actual output together.</a:t>
             </a:r>
           </a:p>
           <a:p/>
@@ -1864,7 +1869,7 @@
           </a:p>
           <a:p>
             <a:r>
-              <a:t>三个控制不要混淆：偏航对准方向、变桨调节叶片角、转矩/转速优化捕获。超过工作限制会限功率或停机；具体阈值取决于型号。</a:t>
+              <a:t>沿曲线从左向右讲：启动前不发电，额定点以下输出增加，额定点后变桨限制功率，超过安全工作范围则停机。3、12、25 m/s均是教学示例，不是Hornsea 2或某型号的官方功率曲线。偏航让转子对准风向。</a:t>
             </a:r>
           </a:p>
           <a:p/>
@@ -2064,7 +2069,7 @@
           </a:p>
           <a:p>
             <a:r>
-              <a:t>There are three performance concepts that we should keep separate. First, the power coefficient describes aerodynamic capture at a particular operating condition. Second, downstream efficiency describes mechanical and electrical conversion losses. Third, capacity factor describes energy production over time. Capacity factor is actual energy divided by rated power multiplied by the period length. It is not the fraction of wind energy converted into electricity. For example, assume a three-megawatt turbine has an annual capacity factor of thirty-five percent. Over a non-leap year, three megawatts multiplied by eight thousand seven hundred and sixty hours and zero point three five gives about nine point two gigawatt-hours. The thirty-five percent value is an assumption, not a universal industry average. Actual annual output depends on the wind distribution, turbine design, wake effects, availability, electrical losses, and curtailment. This is why two turbines with the same rating may generate different amounts of energy. We have now covered the conversion process and equipment. I will hand over to my partner to explain what happens when the wind farm becomes part of the grid.</a:t>
+              <a:t>There are three performance concepts that we should keep separate. First, the power coefficient describes aerodynamic capture at a particular operating condition. Second, downstream efficiency describes mechanical and electrical conversion losses. Third, capacity factor describes energy production over time. Capacity factor is actual energy divided by rated power multiplied by the period length. It is not the fraction of wind energy converted into electricity. A thirty-five percent capacity factor does not mean that sixty-five percent of the available wind energy was wasted. For example, assume a three-megawatt turbine has an annual capacity factor of thirty-five percent. Over a non-leap year, three megawatts multiplied by eight thousand seven hundred and sixty hours and zero point three five gives about nine point two gigawatt-hours. The thirty-five percent value is an assumption, not a universal industry average. Actual annual output depends on the wind distribution, turbine design, wake effects, availability, electrical losses, and curtailment. This is why two turbines with the same rating may generate different amounts of energy. We have now covered the conversion process and equipment. I will hand over to my partner to explain what happens when the wind farm becomes part of the grid.</a:t>
             </a:r>
           </a:p>
           <a:p/>
@@ -2075,7 +2080,7 @@
           </a:p>
           <a:p>
             <a:r>
-              <a:t>风机效率不等于容量因子。示例3MW和35%均是假设，8760小时为非闰年。提到尾流、可利用率、限电、电损都会影响年发电量。此页结束交接。</a:t>
+              <a:t>风机效率不等于容量因子。示例3MW和35%均是假设，8760小时为非闰年。提到尾流、可利用率、限电、电损都会影响年发电量。此页结束交接。 特别强调：35%的容量因子不代表浪费了65%的风能，而是年发电量相当于全年持续额定输出的35%。</a:t>
             </a:r>
           </a:p>
           <a:p/>
@@ -8116,7 +8121,7 @@
               </a:defRPr>
             </a:pPr>
             <a:r>
-              <a:t>A real offshore plant connects turbines, cables and the grid</a:t>
+              <a:t>North Sea location and a 1.3 GW offshore plant</a:t>
             </a:r>
           </a:p>
         </p:txBody>
@@ -8194,7 +8199,7 @@
               </a:defRPr>
             </a:pPr>
             <a:r>
-              <a:t>Sources: R6, R3</a:t>
+              <a:t>Sources: R6, R3, R8</a:t>
             </a:r>
           </a:p>
         </p:txBody>
@@ -8238,16 +8243,40 @@
           </a:p>
         </p:txBody>
       </p:sp>
-      <p:sp>
-        <p:nvSpPr>
-          <p:cNvPr id="8" name="Rounded Rectangle 7"/>
+      <p:pic>
+        <p:nvPicPr>
+          <p:cNvPr id="8" name="Picture 7" descr="hornsea2_location_map.png"/>
+          <p:cNvPicPr>
+            <a:picLocks noChangeAspect="1"/>
+          </p:cNvPicPr>
+          <p:nvPr/>
+        </p:nvPicPr>
+        <p:blipFill>
+          <a:blip r:embed="rId2"/>
+          <a:stretch>
+            <a:fillRect/>
+          </a:stretch>
+        </p:blipFill>
+        <p:spPr>
+          <a:xfrm>
+            <a:off x="640080" y="1673352"/>
+            <a:ext cx="5532120" cy="4169663"/>
+          </a:xfrm>
+          <a:prstGeom prst="rect">
+            <a:avLst/>
+          </a:prstGeom>
+        </p:spPr>
+      </p:pic>
+      <p:sp>
+        <p:nvSpPr>
+          <p:cNvPr id="9" name="Rounded Rectangle 8"/>
           <p:cNvSpPr/>
           <p:nvPr/>
         </p:nvSpPr>
         <p:spPr>
           <a:xfrm>
-            <a:off x="640080" y="1737360"/>
-            <a:ext cx="3520440" cy="1371600"/>
+            <a:off x="6446520" y="1737360"/>
+            <a:ext cx="5120640" cy="960120"/>
           </a:xfrm>
           <a:prstGeom prst="roundRect">
             <a:avLst>
@@ -8285,14 +8314,14 @@
       </p:sp>
       <p:sp>
         <p:nvSpPr>
-          <p:cNvPr id="9" name="TextBox 8"/>
-          <p:cNvSpPr txBox="1"/>
-          <p:nvPr/>
-        </p:nvSpPr>
-        <p:spPr>
-          <a:xfrm>
-            <a:off x="822960" y="1865376"/>
-            <a:ext cx="3154680" cy="594360"/>
+          <p:cNvPr id="10" name="TextBox 9"/>
+          <p:cNvSpPr txBox="1"/>
+          <p:nvPr/>
+        </p:nvSpPr>
+        <p:spPr>
+          <a:xfrm>
+            <a:off x="6647688" y="1828800"/>
+            <a:ext cx="4663440" cy="438912"/>
           </a:xfrm>
           <a:prstGeom prst="rect">
             <a:avLst/>
@@ -8309,7 +8338,7 @@
               <a:spcAft>
                 <a:spcPts val="500"/>
               </a:spcAft>
-              <a:defRPr sz="3000" b="1">
+              <a:defRPr sz="2900" b="1">
                 <a:solidFill>
                   <a:srgbClr val="008D91"/>
                 </a:solidFill>
@@ -8324,14 +8353,14 @@
       </p:sp>
       <p:sp>
         <p:nvSpPr>
-          <p:cNvPr id="10" name="TextBox 9"/>
-          <p:cNvSpPr txBox="1"/>
-          <p:nvPr/>
-        </p:nvSpPr>
-        <p:spPr>
-          <a:xfrm>
-            <a:off x="822960" y="2514600"/>
-            <a:ext cx="3154680" cy="365760"/>
+          <p:cNvPr id="11" name="TextBox 10"/>
+          <p:cNvSpPr txBox="1"/>
+          <p:nvPr/>
+        </p:nvSpPr>
+        <p:spPr>
+          <a:xfrm>
+            <a:off x="6647688" y="2304288"/>
+            <a:ext cx="4663440" cy="329184"/>
           </a:xfrm>
           <a:prstGeom prst="rect">
             <a:avLst/>
@@ -8363,14 +8392,14 @@
       </p:sp>
       <p:sp>
         <p:nvSpPr>
-          <p:cNvPr id="11" name="Rounded Rectangle 10"/>
+          <p:cNvPr id="12" name="Rounded Rectangle 11"/>
           <p:cNvSpPr/>
           <p:nvPr/>
         </p:nvSpPr>
         <p:spPr>
           <a:xfrm>
-            <a:off x="4416552" y="1737360"/>
-            <a:ext cx="3520440" cy="1371600"/>
+            <a:off x="6446520" y="2843784"/>
+            <a:ext cx="5120640" cy="960120"/>
           </a:xfrm>
           <a:prstGeom prst="roundRect">
             <a:avLst>
@@ -8408,14 +8437,14 @@
       </p:sp>
       <p:sp>
         <p:nvSpPr>
-          <p:cNvPr id="12" name="TextBox 11"/>
-          <p:cNvSpPr txBox="1"/>
-          <p:nvPr/>
-        </p:nvSpPr>
-        <p:spPr>
-          <a:xfrm>
-            <a:off x="4599432" y="1865376"/>
-            <a:ext cx="3154680" cy="594360"/>
+          <p:cNvPr id="13" name="TextBox 12"/>
+          <p:cNvSpPr txBox="1"/>
+          <p:nvPr/>
+        </p:nvSpPr>
+        <p:spPr>
+          <a:xfrm>
+            <a:off x="6647688" y="2935224"/>
+            <a:ext cx="4663440" cy="438912"/>
           </a:xfrm>
           <a:prstGeom prst="rect">
             <a:avLst/>
@@ -8432,7 +8461,7 @@
               <a:spcAft>
                 <a:spcPts val="500"/>
               </a:spcAft>
-              <a:defRPr sz="3000" b="1">
+              <a:defRPr sz="2900" b="1">
                 <a:solidFill>
                   <a:srgbClr val="008D91"/>
                 </a:solidFill>
@@ -8447,14 +8476,14 @@
       </p:sp>
       <p:sp>
         <p:nvSpPr>
-          <p:cNvPr id="13" name="TextBox 12"/>
-          <p:cNvSpPr txBox="1"/>
-          <p:nvPr/>
-        </p:nvSpPr>
-        <p:spPr>
-          <a:xfrm>
-            <a:off x="4599432" y="2514600"/>
-            <a:ext cx="3154680" cy="365760"/>
+          <p:cNvPr id="14" name="TextBox 13"/>
+          <p:cNvSpPr txBox="1"/>
+          <p:nvPr/>
+        </p:nvSpPr>
+        <p:spPr>
+          <a:xfrm>
+            <a:off x="6647688" y="3410712"/>
+            <a:ext cx="4663440" cy="329184"/>
           </a:xfrm>
           <a:prstGeom prst="rect">
             <a:avLst/>
@@ -8486,14 +8515,14 @@
       </p:sp>
       <p:sp>
         <p:nvSpPr>
-          <p:cNvPr id="14" name="Rounded Rectangle 13"/>
+          <p:cNvPr id="15" name="Rounded Rectangle 14"/>
           <p:cNvSpPr/>
           <p:nvPr/>
         </p:nvSpPr>
         <p:spPr>
           <a:xfrm>
-            <a:off x="8193023" y="1737360"/>
-            <a:ext cx="3520440" cy="1371600"/>
+            <a:off x="6446520" y="3950208"/>
+            <a:ext cx="5120640" cy="960120"/>
           </a:xfrm>
           <a:prstGeom prst="roundRect">
             <a:avLst>
@@ -8531,14 +8560,14 @@
       </p:sp>
       <p:sp>
         <p:nvSpPr>
-          <p:cNvPr id="15" name="TextBox 14"/>
-          <p:cNvSpPr txBox="1"/>
-          <p:nvPr/>
-        </p:nvSpPr>
-        <p:spPr>
-          <a:xfrm>
-            <a:off x="8375904" y="1865376"/>
-            <a:ext cx="3154680" cy="594360"/>
+          <p:cNvPr id="16" name="TextBox 15"/>
+          <p:cNvSpPr txBox="1"/>
+          <p:nvPr/>
+        </p:nvSpPr>
+        <p:spPr>
+          <a:xfrm>
+            <a:off x="6647688" y="4041648"/>
+            <a:ext cx="4663440" cy="438912"/>
           </a:xfrm>
           <a:prstGeom prst="rect">
             <a:avLst/>
@@ -8555,7 +8584,7 @@
               <a:spcAft>
                 <a:spcPts val="500"/>
               </a:spcAft>
-              <a:defRPr sz="3000" b="1">
+              <a:defRPr sz="2900" b="1">
                 <a:solidFill>
                   <a:srgbClr val="008D91"/>
                 </a:solidFill>
@@ -8570,14 +8599,14 @@
       </p:sp>
       <p:sp>
         <p:nvSpPr>
-          <p:cNvPr id="16" name="TextBox 15"/>
-          <p:cNvSpPr txBox="1"/>
-          <p:nvPr/>
-        </p:nvSpPr>
-        <p:spPr>
-          <a:xfrm>
-            <a:off x="8375904" y="2514600"/>
-            <a:ext cx="3154680" cy="365760"/>
+          <p:cNvPr id="17" name="TextBox 16"/>
+          <p:cNvSpPr txBox="1"/>
+          <p:nvPr/>
+        </p:nvSpPr>
+        <p:spPr>
+          <a:xfrm>
+            <a:off x="6647688" y="4517136"/>
+            <a:ext cx="4663440" cy="329184"/>
           </a:xfrm>
           <a:prstGeom prst="rect">
             <a:avLst/>
@@ -8602,21 +8631,21 @@
               </a:defRPr>
             </a:pPr>
             <a:r>
-              <a:t>Rated capacity</a:t>
-            </a:r>
-          </a:p>
-        </p:txBody>
-      </p:sp>
-      <p:sp>
-        <p:nvSpPr>
-          <p:cNvPr id="17" name="Rounded Rectangle 16"/>
+              <a:t>Rated capacity, not constant output</a:t>
+            </a:r>
+          </a:p>
+        </p:txBody>
+      </p:sp>
+      <p:sp>
+        <p:nvSpPr>
+          <p:cNvPr id="18" name="Rounded Rectangle 17"/>
           <p:cNvSpPr/>
           <p:nvPr/>
         </p:nvSpPr>
         <p:spPr>
           <a:xfrm>
-            <a:off x="640080" y="3822191"/>
-            <a:ext cx="4572000" cy="1691640"/>
+            <a:off x="6446520" y="5193792"/>
+            <a:ext cx="5120640" cy="594360"/>
           </a:xfrm>
           <a:prstGeom prst="roundRect">
             <a:avLst>
@@ -8624,7 +8653,7 @@
             </a:avLst>
           </a:prstGeom>
           <a:solidFill>
-            <a:srgbClr val="E0F1F5"/>
+            <a:srgbClr val="102538"/>
           </a:solidFill>
           <a:ln>
             <a:noFill/>
@@ -8652,610 +8681,16 @@
           </a:p>
         </p:txBody>
       </p:sp>
-      <p:cxnSp>
-        <p:nvCxnSpPr>
-          <p:cNvPr id="18" name="Connector 17"/>
-          <p:cNvCxnSpPr/>
-          <p:nvPr/>
-        </p:nvCxnSpPr>
-        <p:spPr>
-          <a:xfrm>
-            <a:off x="1554480" y="4261104"/>
-            <a:ext cx="0" cy="636422"/>
-          </a:xfrm>
-          <a:prstGeom prst="line">
-            <a:avLst/>
-          </a:prstGeom>
-          <a:ln w="63500">
-            <a:solidFill>
-              <a:srgbClr val="5C6F7E"/>
-            </a:solidFill>
-          </a:ln>
-        </p:spPr>
-        <p:style>
-          <a:lnRef idx="2">
-            <a:schemeClr val="accent1"/>
-          </a:lnRef>
-          <a:fillRef idx="0">
-            <a:schemeClr val="accent1"/>
-          </a:fillRef>
-          <a:effectRef idx="1">
-            <a:schemeClr val="accent1"/>
-          </a:effectRef>
-          <a:fontRef idx="minor">
-            <a:schemeClr val="tx1"/>
-          </a:fontRef>
-        </p:style>
-      </p:cxnSp>
-      <p:sp>
-        <p:nvSpPr>
-          <p:cNvPr id="19" name="Oval 18"/>
-          <p:cNvSpPr/>
-          <p:nvPr/>
-        </p:nvSpPr>
-        <p:spPr>
-          <a:xfrm>
-            <a:off x="1533997" y="4204045"/>
-            <a:ext cx="40965" cy="40965"/>
-          </a:xfrm>
-          <a:prstGeom prst="ellipse">
-            <a:avLst/>
-          </a:prstGeom>
-          <a:solidFill>
-            <a:srgbClr val="008D91"/>
-          </a:solidFill>
-          <a:ln>
-            <a:noFill/>
-          </a:ln>
-        </p:spPr>
-        <p:style>
-          <a:lnRef idx="1">
-            <a:schemeClr val="accent1"/>
-          </a:lnRef>
-          <a:fillRef idx="3">
-            <a:schemeClr val="accent1"/>
-          </a:fillRef>
-          <a:effectRef idx="2">
-            <a:schemeClr val="accent1"/>
-          </a:effectRef>
-          <a:fontRef idx="minor">
-            <a:schemeClr val="lt1"/>
-          </a:fontRef>
-        </p:style>
-        <p:txBody>
-          <a:bodyPr rtlCol="0" anchor="ctr"/>
-          <a:lstStyle/>
-          <a:p>
-            <a:pPr algn="ctr"/>
-          </a:p>
-        </p:txBody>
-      </p:sp>
-      <p:cxnSp>
-        <p:nvCxnSpPr>
-          <p:cNvPr id="20" name="Connector 19"/>
-          <p:cNvCxnSpPr/>
-          <p:nvPr/>
-        </p:nvCxnSpPr>
-        <p:spPr>
-          <a:xfrm flipV="1">
-            <a:off x="1554480" y="3917289"/>
-            <a:ext cx="0" cy="307239"/>
-          </a:xfrm>
-          <a:prstGeom prst="line">
-            <a:avLst/>
-          </a:prstGeom>
-          <a:ln w="36576">
-            <a:solidFill>
-              <a:srgbClr val="008D91"/>
-            </a:solidFill>
-          </a:ln>
-        </p:spPr>
-        <p:style>
-          <a:lnRef idx="2">
-            <a:schemeClr val="accent1"/>
-          </a:lnRef>
-          <a:fillRef idx="0">
-            <a:schemeClr val="accent1"/>
-          </a:fillRef>
-          <a:effectRef idx="1">
-            <a:schemeClr val="accent1"/>
-          </a:effectRef>
-          <a:fontRef idx="minor">
-            <a:schemeClr val="tx1"/>
-          </a:fontRef>
-        </p:style>
-      </p:cxnSp>
-      <p:cxnSp>
-        <p:nvCxnSpPr>
-          <p:cNvPr id="21" name="Connector 20"/>
-          <p:cNvCxnSpPr/>
-          <p:nvPr/>
-        </p:nvCxnSpPr>
-        <p:spPr>
-          <a:xfrm>
-            <a:off x="1554480" y="4224528"/>
-            <a:ext cx="266076" cy="153619"/>
-          </a:xfrm>
-          <a:prstGeom prst="line">
-            <a:avLst/>
-          </a:prstGeom>
-          <a:ln w="36576">
-            <a:solidFill>
-              <a:srgbClr val="008D91"/>
-            </a:solidFill>
-          </a:ln>
-        </p:spPr>
-        <p:style>
-          <a:lnRef idx="2">
-            <a:schemeClr val="accent1"/>
-          </a:lnRef>
-          <a:fillRef idx="0">
-            <a:schemeClr val="accent1"/>
-          </a:fillRef>
-          <a:effectRef idx="1">
-            <a:schemeClr val="accent1"/>
-          </a:effectRef>
-          <a:fontRef idx="minor">
-            <a:schemeClr val="tx1"/>
-          </a:fontRef>
-        </p:style>
-      </p:cxnSp>
-      <p:cxnSp>
-        <p:nvCxnSpPr>
-          <p:cNvPr id="22" name="Connector 21"/>
-          <p:cNvCxnSpPr/>
-          <p:nvPr/>
-        </p:nvCxnSpPr>
-        <p:spPr>
-          <a:xfrm flipH="1">
-            <a:off x="1288403" y="4224528"/>
-            <a:ext cx="266077" cy="153619"/>
-          </a:xfrm>
-          <a:prstGeom prst="line">
-            <a:avLst/>
-          </a:prstGeom>
-          <a:ln w="36576">
-            <a:solidFill>
-              <a:srgbClr val="008D91"/>
-            </a:solidFill>
-          </a:ln>
-        </p:spPr>
-        <p:style>
-          <a:lnRef idx="2">
-            <a:schemeClr val="accent1"/>
-          </a:lnRef>
-          <a:fillRef idx="0">
-            <a:schemeClr val="accent1"/>
-          </a:fillRef>
-          <a:effectRef idx="1">
-            <a:schemeClr val="accent1"/>
-          </a:effectRef>
-          <a:fontRef idx="minor">
-            <a:schemeClr val="tx1"/>
-          </a:fontRef>
-        </p:style>
-      </p:cxnSp>
-      <p:cxnSp>
-        <p:nvCxnSpPr>
-          <p:cNvPr id="23" name="Connector 22"/>
-          <p:cNvCxnSpPr/>
-          <p:nvPr/>
-        </p:nvCxnSpPr>
-        <p:spPr>
-          <a:xfrm>
-            <a:off x="2788920" y="4261104"/>
-            <a:ext cx="0" cy="636422"/>
-          </a:xfrm>
-          <a:prstGeom prst="line">
-            <a:avLst/>
-          </a:prstGeom>
-          <a:ln w="63500">
-            <a:solidFill>
-              <a:srgbClr val="5C6F7E"/>
-            </a:solidFill>
-          </a:ln>
-        </p:spPr>
-        <p:style>
-          <a:lnRef idx="2">
-            <a:schemeClr val="accent1"/>
-          </a:lnRef>
-          <a:fillRef idx="0">
-            <a:schemeClr val="accent1"/>
-          </a:fillRef>
-          <a:effectRef idx="1">
-            <a:schemeClr val="accent1"/>
-          </a:effectRef>
-          <a:fontRef idx="minor">
-            <a:schemeClr val="tx1"/>
-          </a:fontRef>
-        </p:style>
-      </p:cxnSp>
-      <p:sp>
-        <p:nvSpPr>
-          <p:cNvPr id="24" name="Oval 23"/>
-          <p:cNvSpPr/>
-          <p:nvPr/>
-        </p:nvSpPr>
-        <p:spPr>
-          <a:xfrm>
-            <a:off x="2768437" y="4204045"/>
-            <a:ext cx="40965" cy="40965"/>
-          </a:xfrm>
-          <a:prstGeom prst="ellipse">
-            <a:avLst/>
-          </a:prstGeom>
-          <a:solidFill>
-            <a:srgbClr val="008D91"/>
-          </a:solidFill>
-          <a:ln>
-            <a:noFill/>
-          </a:ln>
-        </p:spPr>
-        <p:style>
-          <a:lnRef idx="1">
-            <a:schemeClr val="accent1"/>
-          </a:lnRef>
-          <a:fillRef idx="3">
-            <a:schemeClr val="accent1"/>
-          </a:fillRef>
-          <a:effectRef idx="2">
-            <a:schemeClr val="accent1"/>
-          </a:effectRef>
-          <a:fontRef idx="minor">
-            <a:schemeClr val="lt1"/>
-          </a:fontRef>
-        </p:style>
-        <p:txBody>
-          <a:bodyPr rtlCol="0" anchor="ctr"/>
-          <a:lstStyle/>
-          <a:p>
-            <a:pPr algn="ctr"/>
-          </a:p>
-        </p:txBody>
-      </p:sp>
-      <p:cxnSp>
-        <p:nvCxnSpPr>
-          <p:cNvPr id="25" name="Connector 24"/>
-          <p:cNvCxnSpPr/>
-          <p:nvPr/>
-        </p:nvCxnSpPr>
-        <p:spPr>
-          <a:xfrm flipV="1">
-            <a:off x="2788920" y="3917289"/>
-            <a:ext cx="0" cy="307239"/>
-          </a:xfrm>
-          <a:prstGeom prst="line">
-            <a:avLst/>
-          </a:prstGeom>
-          <a:ln w="36576">
-            <a:solidFill>
-              <a:srgbClr val="008D91"/>
-            </a:solidFill>
-          </a:ln>
-        </p:spPr>
-        <p:style>
-          <a:lnRef idx="2">
-            <a:schemeClr val="accent1"/>
-          </a:lnRef>
-          <a:fillRef idx="0">
-            <a:schemeClr val="accent1"/>
-          </a:fillRef>
-          <a:effectRef idx="1">
-            <a:schemeClr val="accent1"/>
-          </a:effectRef>
-          <a:fontRef idx="minor">
-            <a:schemeClr val="tx1"/>
-          </a:fontRef>
-        </p:style>
-      </p:cxnSp>
-      <p:cxnSp>
-        <p:nvCxnSpPr>
-          <p:cNvPr id="26" name="Connector 25"/>
-          <p:cNvCxnSpPr/>
-          <p:nvPr/>
-        </p:nvCxnSpPr>
-        <p:spPr>
-          <a:xfrm>
-            <a:off x="2788920" y="4224528"/>
-            <a:ext cx="266076" cy="153619"/>
-          </a:xfrm>
-          <a:prstGeom prst="line">
-            <a:avLst/>
-          </a:prstGeom>
-          <a:ln w="36576">
-            <a:solidFill>
-              <a:srgbClr val="008D91"/>
-            </a:solidFill>
-          </a:ln>
-        </p:spPr>
-        <p:style>
-          <a:lnRef idx="2">
-            <a:schemeClr val="accent1"/>
-          </a:lnRef>
-          <a:fillRef idx="0">
-            <a:schemeClr val="accent1"/>
-          </a:fillRef>
-          <a:effectRef idx="1">
-            <a:schemeClr val="accent1"/>
-          </a:effectRef>
-          <a:fontRef idx="minor">
-            <a:schemeClr val="tx1"/>
-          </a:fontRef>
-        </p:style>
-      </p:cxnSp>
-      <p:cxnSp>
-        <p:nvCxnSpPr>
-          <p:cNvPr id="27" name="Connector 26"/>
-          <p:cNvCxnSpPr/>
-          <p:nvPr/>
-        </p:nvCxnSpPr>
-        <p:spPr>
-          <a:xfrm flipH="1">
-            <a:off x="2522843" y="4224528"/>
-            <a:ext cx="266077" cy="153619"/>
-          </a:xfrm>
-          <a:prstGeom prst="line">
-            <a:avLst/>
-          </a:prstGeom>
-          <a:ln w="36576">
-            <a:solidFill>
-              <a:srgbClr val="008D91"/>
-            </a:solidFill>
-          </a:ln>
-        </p:spPr>
-        <p:style>
-          <a:lnRef idx="2">
-            <a:schemeClr val="accent1"/>
-          </a:lnRef>
-          <a:fillRef idx="0">
-            <a:schemeClr val="accent1"/>
-          </a:fillRef>
-          <a:effectRef idx="1">
-            <a:schemeClr val="accent1"/>
-          </a:effectRef>
-          <a:fontRef idx="minor">
-            <a:schemeClr val="tx1"/>
-          </a:fontRef>
-        </p:style>
-      </p:cxnSp>
-      <p:cxnSp>
-        <p:nvCxnSpPr>
-          <p:cNvPr id="28" name="Connector 27"/>
-          <p:cNvCxnSpPr/>
-          <p:nvPr/>
-        </p:nvCxnSpPr>
-        <p:spPr>
-          <a:xfrm>
-            <a:off x="4023360" y="4261104"/>
-            <a:ext cx="0" cy="636422"/>
-          </a:xfrm>
-          <a:prstGeom prst="line">
-            <a:avLst/>
-          </a:prstGeom>
-          <a:ln w="63500">
-            <a:solidFill>
-              <a:srgbClr val="5C6F7E"/>
-            </a:solidFill>
-          </a:ln>
-        </p:spPr>
-        <p:style>
-          <a:lnRef idx="2">
-            <a:schemeClr val="accent1"/>
-          </a:lnRef>
-          <a:fillRef idx="0">
-            <a:schemeClr val="accent1"/>
-          </a:fillRef>
-          <a:effectRef idx="1">
-            <a:schemeClr val="accent1"/>
-          </a:effectRef>
-          <a:fontRef idx="minor">
-            <a:schemeClr val="tx1"/>
-          </a:fontRef>
-        </p:style>
-      </p:cxnSp>
-      <p:sp>
-        <p:nvSpPr>
-          <p:cNvPr id="29" name="Oval 28"/>
-          <p:cNvSpPr/>
-          <p:nvPr/>
-        </p:nvSpPr>
-        <p:spPr>
-          <a:xfrm>
-            <a:off x="4002877" y="4204045"/>
-            <a:ext cx="40965" cy="40965"/>
-          </a:xfrm>
-          <a:prstGeom prst="ellipse">
-            <a:avLst/>
-          </a:prstGeom>
-          <a:solidFill>
-            <a:srgbClr val="008D91"/>
-          </a:solidFill>
-          <a:ln>
-            <a:noFill/>
-          </a:ln>
-        </p:spPr>
-        <p:style>
-          <a:lnRef idx="1">
-            <a:schemeClr val="accent1"/>
-          </a:lnRef>
-          <a:fillRef idx="3">
-            <a:schemeClr val="accent1"/>
-          </a:fillRef>
-          <a:effectRef idx="2">
-            <a:schemeClr val="accent1"/>
-          </a:effectRef>
-          <a:fontRef idx="minor">
-            <a:schemeClr val="lt1"/>
-          </a:fontRef>
-        </p:style>
-        <p:txBody>
-          <a:bodyPr rtlCol="0" anchor="ctr"/>
-          <a:lstStyle/>
-          <a:p>
-            <a:pPr algn="ctr"/>
-          </a:p>
-        </p:txBody>
-      </p:sp>
-      <p:cxnSp>
-        <p:nvCxnSpPr>
-          <p:cNvPr id="30" name="Connector 29"/>
-          <p:cNvCxnSpPr/>
-          <p:nvPr/>
-        </p:nvCxnSpPr>
-        <p:spPr>
-          <a:xfrm flipV="1">
-            <a:off x="4023360" y="3917289"/>
-            <a:ext cx="0" cy="307239"/>
-          </a:xfrm>
-          <a:prstGeom prst="line">
-            <a:avLst/>
-          </a:prstGeom>
-          <a:ln w="36576">
-            <a:solidFill>
-              <a:srgbClr val="008D91"/>
-            </a:solidFill>
-          </a:ln>
-        </p:spPr>
-        <p:style>
-          <a:lnRef idx="2">
-            <a:schemeClr val="accent1"/>
-          </a:lnRef>
-          <a:fillRef idx="0">
-            <a:schemeClr val="accent1"/>
-          </a:fillRef>
-          <a:effectRef idx="1">
-            <a:schemeClr val="accent1"/>
-          </a:effectRef>
-          <a:fontRef idx="minor">
-            <a:schemeClr val="tx1"/>
-          </a:fontRef>
-        </p:style>
-      </p:cxnSp>
-      <p:cxnSp>
-        <p:nvCxnSpPr>
-          <p:cNvPr id="31" name="Connector 30"/>
-          <p:cNvCxnSpPr/>
-          <p:nvPr/>
-        </p:nvCxnSpPr>
-        <p:spPr>
-          <a:xfrm>
-            <a:off x="4023360" y="4224528"/>
-            <a:ext cx="266076" cy="153619"/>
-          </a:xfrm>
-          <a:prstGeom prst="line">
-            <a:avLst/>
-          </a:prstGeom>
-          <a:ln w="36576">
-            <a:solidFill>
-              <a:srgbClr val="008D91"/>
-            </a:solidFill>
-          </a:ln>
-        </p:spPr>
-        <p:style>
-          <a:lnRef idx="2">
-            <a:schemeClr val="accent1"/>
-          </a:lnRef>
-          <a:fillRef idx="0">
-            <a:schemeClr val="accent1"/>
-          </a:fillRef>
-          <a:effectRef idx="1">
-            <a:schemeClr val="accent1"/>
-          </a:effectRef>
-          <a:fontRef idx="minor">
-            <a:schemeClr val="tx1"/>
-          </a:fontRef>
-        </p:style>
-      </p:cxnSp>
-      <p:cxnSp>
-        <p:nvCxnSpPr>
-          <p:cNvPr id="32" name="Connector 31"/>
-          <p:cNvCxnSpPr/>
-          <p:nvPr/>
-        </p:nvCxnSpPr>
-        <p:spPr>
-          <a:xfrm flipH="1">
-            <a:off x="3757283" y="4224528"/>
-            <a:ext cx="266077" cy="153619"/>
-          </a:xfrm>
-          <a:prstGeom prst="line">
-            <a:avLst/>
-          </a:prstGeom>
-          <a:ln w="36576">
-            <a:solidFill>
-              <a:srgbClr val="008D91"/>
-            </a:solidFill>
-          </a:ln>
-        </p:spPr>
-        <p:style>
-          <a:lnRef idx="2">
-            <a:schemeClr val="accent1"/>
-          </a:lnRef>
-          <a:fillRef idx="0">
-            <a:schemeClr val="accent1"/>
-          </a:fillRef>
-          <a:effectRef idx="1">
-            <a:schemeClr val="accent1"/>
-          </a:effectRef>
-          <a:fontRef idx="minor">
-            <a:schemeClr val="tx1"/>
-          </a:fontRef>
-        </p:style>
-      </p:cxnSp>
-      <p:sp>
-        <p:nvSpPr>
-          <p:cNvPr id="33" name="Rounded Rectangle 32"/>
-          <p:cNvSpPr/>
-          <p:nvPr/>
-        </p:nvSpPr>
-        <p:spPr>
-          <a:xfrm>
-            <a:off x="5440680" y="4023360"/>
-            <a:ext cx="1719072" cy="1024128"/>
-          </a:xfrm>
-          <a:prstGeom prst="roundRect">
-            <a:avLst>
-              <a:gd name="adj" fmla="val 12000"/>
-            </a:avLst>
-          </a:prstGeom>
-          <a:solidFill>
-            <a:srgbClr val="E5EDF3"/>
-          </a:solidFill>
-          <a:ln>
-            <a:noFill/>
-          </a:ln>
-        </p:spPr>
-        <p:style>
-          <a:lnRef idx="1">
-            <a:schemeClr val="accent1"/>
-          </a:lnRef>
-          <a:fillRef idx="3">
-            <a:schemeClr val="accent1"/>
-          </a:fillRef>
-          <a:effectRef idx="2">
-            <a:schemeClr val="accent1"/>
-          </a:effectRef>
-          <a:fontRef idx="minor">
-            <a:schemeClr val="lt1"/>
-          </a:fontRef>
-        </p:style>
-        <p:txBody>
-          <a:bodyPr rtlCol="0" anchor="ctr"/>
-          <a:lstStyle/>
-          <a:p>
-            <a:pPr algn="ctr"/>
-          </a:p>
-        </p:txBody>
-      </p:sp>
-      <p:sp>
-        <p:nvSpPr>
-          <p:cNvPr id="34" name="TextBox 33"/>
-          <p:cNvSpPr txBox="1"/>
-          <p:nvPr/>
-        </p:nvSpPr>
-        <p:spPr>
-          <a:xfrm>
-            <a:off x="5495544" y="4142232"/>
-            <a:ext cx="1609344" cy="731520"/>
+      <p:sp>
+        <p:nvSpPr>
+          <p:cNvPr id="19" name="TextBox 18"/>
+          <p:cNvSpPr txBox="1"/>
+          <p:nvPr/>
+        </p:nvSpPr>
+        <p:spPr>
+          <a:xfrm>
+            <a:off x="6611112" y="5303520"/>
+            <a:ext cx="4800600" cy="384048"/>
           </a:xfrm>
           <a:prstGeom prst="rect">
             <a:avLst/>
@@ -9272,479 +8707,29 @@
               <a:spcAft>
                 <a:spcPts val="500"/>
               </a:spcAft>
-              <a:defRPr sz="1800" b="1">
-                <a:solidFill>
-                  <a:srgbClr val="183247"/>
-                </a:solidFill>
-                <a:latin typeface="Arial"/>
-              </a:defRPr>
-            </a:pPr>
-            <a:r>
-              <a:t>Offshore</a:t>
-            </a:r>
-          </a:p>
-          <a:p>
-            <a:pPr algn="ctr">
-              <a:spcAft>
-                <a:spcPts val="500"/>
-              </a:spcAft>
-              <a:defRPr sz="1800" b="1">
-                <a:solidFill>
-                  <a:srgbClr val="183247"/>
-                </a:solidFill>
-                <a:latin typeface="Arial"/>
-              </a:defRPr>
-            </a:pPr>
-            <a:r>
-              <a:t>substation</a:t>
-            </a:r>
-          </a:p>
-        </p:txBody>
-      </p:sp>
-      <p:sp>
-        <p:nvSpPr>
-          <p:cNvPr id="35" name="Rounded Rectangle 34"/>
-          <p:cNvSpPr/>
-          <p:nvPr/>
-        </p:nvSpPr>
-        <p:spPr>
-          <a:xfrm>
-            <a:off x="7498079" y="4023360"/>
-            <a:ext cx="1719072" cy="1024128"/>
-          </a:xfrm>
-          <a:prstGeom prst="roundRect">
-            <a:avLst>
-              <a:gd name="adj" fmla="val 12000"/>
-            </a:avLst>
-          </a:prstGeom>
-          <a:solidFill>
-            <a:srgbClr val="E5EDF3"/>
-          </a:solidFill>
-          <a:ln>
-            <a:noFill/>
-          </a:ln>
-        </p:spPr>
-        <p:style>
-          <a:lnRef idx="1">
-            <a:schemeClr val="accent1"/>
-          </a:lnRef>
-          <a:fillRef idx="3">
-            <a:schemeClr val="accent1"/>
-          </a:fillRef>
-          <a:effectRef idx="2">
-            <a:schemeClr val="accent1"/>
-          </a:effectRef>
-          <a:fontRef idx="minor">
-            <a:schemeClr val="lt1"/>
-          </a:fontRef>
-        </p:style>
-        <p:txBody>
-          <a:bodyPr rtlCol="0" anchor="ctr"/>
-          <a:lstStyle/>
-          <a:p>
-            <a:pPr algn="ctr"/>
-          </a:p>
-        </p:txBody>
-      </p:sp>
-      <p:sp>
-        <p:nvSpPr>
-          <p:cNvPr id="36" name="TextBox 35"/>
-          <p:cNvSpPr txBox="1"/>
-          <p:nvPr/>
-        </p:nvSpPr>
-        <p:spPr>
-          <a:xfrm>
-            <a:off x="7552944" y="4142232"/>
-            <a:ext cx="1609344" cy="731520"/>
-          </a:xfrm>
-          <a:prstGeom prst="rect">
-            <a:avLst/>
-          </a:prstGeom>
-          <a:noFill/>
-        </p:spPr>
-        <p:txBody>
-          <a:bodyPr wrap="square" lIns="27432" rIns="27432" tIns="18288" bIns="18288">
-            <a:spAutoFit/>
-          </a:bodyPr>
-          <a:lstStyle/>
-          <a:p>
-            <a:pPr algn="ctr">
-              <a:spcAft>
-                <a:spcPts val="500"/>
-              </a:spcAft>
-              <a:defRPr sz="1800" b="1">
-                <a:solidFill>
-                  <a:srgbClr val="183247"/>
-                </a:solidFill>
-                <a:latin typeface="Arial"/>
-              </a:defRPr>
-            </a:pPr>
-            <a:r>
-              <a:t>Export</a:t>
-            </a:r>
-          </a:p>
-          <a:p>
-            <a:pPr algn="ctr">
-              <a:spcAft>
-                <a:spcPts val="500"/>
-              </a:spcAft>
-              <a:defRPr sz="1800" b="1">
-                <a:solidFill>
-                  <a:srgbClr val="183247"/>
-                </a:solidFill>
-                <a:latin typeface="Arial"/>
-              </a:defRPr>
-            </a:pPr>
-            <a:r>
-              <a:t>cables</a:t>
-            </a:r>
-          </a:p>
-        </p:txBody>
-      </p:sp>
-      <p:sp>
-        <p:nvSpPr>
-          <p:cNvPr id="37" name="Rounded Rectangle 36"/>
-          <p:cNvSpPr/>
-          <p:nvPr/>
-        </p:nvSpPr>
-        <p:spPr>
-          <a:xfrm>
-            <a:off x="9555480" y="4023360"/>
-            <a:ext cx="1719072" cy="1024128"/>
-          </a:xfrm>
-          <a:prstGeom prst="roundRect">
-            <a:avLst>
-              <a:gd name="adj" fmla="val 12000"/>
-            </a:avLst>
-          </a:prstGeom>
-          <a:solidFill>
-            <a:srgbClr val="E5EDF3"/>
-          </a:solidFill>
-          <a:ln>
-            <a:noFill/>
-          </a:ln>
-        </p:spPr>
-        <p:style>
-          <a:lnRef idx="1">
-            <a:schemeClr val="accent1"/>
-          </a:lnRef>
-          <a:fillRef idx="3">
-            <a:schemeClr val="accent1"/>
-          </a:fillRef>
-          <a:effectRef idx="2">
-            <a:schemeClr val="accent1"/>
-          </a:effectRef>
-          <a:fontRef idx="minor">
-            <a:schemeClr val="lt1"/>
-          </a:fontRef>
-        </p:style>
-        <p:txBody>
-          <a:bodyPr rtlCol="0" anchor="ctr"/>
-          <a:lstStyle/>
-          <a:p>
-            <a:pPr algn="ctr"/>
-          </a:p>
-        </p:txBody>
-      </p:sp>
-      <p:sp>
-        <p:nvSpPr>
-          <p:cNvPr id="38" name="TextBox 37"/>
-          <p:cNvSpPr txBox="1"/>
-          <p:nvPr/>
-        </p:nvSpPr>
-        <p:spPr>
-          <a:xfrm>
-            <a:off x="9610344" y="4142232"/>
-            <a:ext cx="1609344" cy="731520"/>
-          </a:xfrm>
-          <a:prstGeom prst="rect">
-            <a:avLst/>
-          </a:prstGeom>
-          <a:noFill/>
-        </p:spPr>
-        <p:txBody>
-          <a:bodyPr wrap="square" lIns="27432" rIns="27432" tIns="18288" bIns="18288">
-            <a:spAutoFit/>
-          </a:bodyPr>
-          <a:lstStyle/>
-          <a:p>
-            <a:pPr algn="ctr">
-              <a:spcAft>
-                <a:spcPts val="500"/>
-              </a:spcAft>
-              <a:defRPr sz="1800" b="1">
-                <a:solidFill>
-                  <a:srgbClr val="183247"/>
-                </a:solidFill>
-                <a:latin typeface="Arial"/>
-              </a:defRPr>
-            </a:pPr>
-            <a:r>
-              <a:t>Onshore</a:t>
-            </a:r>
-          </a:p>
-          <a:p>
-            <a:pPr algn="ctr">
-              <a:spcAft>
-                <a:spcPts val="500"/>
-              </a:spcAft>
-              <a:defRPr sz="1800" b="1">
-                <a:solidFill>
-                  <a:srgbClr val="183247"/>
-                </a:solidFill>
-                <a:latin typeface="Arial"/>
-              </a:defRPr>
-            </a:pPr>
-            <a:r>
-              <a:t>grid</a:t>
-            </a:r>
-          </a:p>
-        </p:txBody>
-      </p:sp>
-      <p:cxnSp>
-        <p:nvCxnSpPr>
-          <p:cNvPr id="39" name="Connector 38"/>
-          <p:cNvCxnSpPr/>
-          <p:nvPr/>
-        </p:nvCxnSpPr>
-        <p:spPr>
-          <a:xfrm>
-            <a:off x="5212080" y="4553712"/>
-            <a:ext cx="210312" cy="0"/>
-          </a:xfrm>
-          <a:prstGeom prst="line">
-            <a:avLst/>
-          </a:prstGeom>
-          <a:ln w="38100">
-            <a:solidFill>
-              <a:srgbClr val="008D91"/>
-            </a:solidFill>
-          </a:ln>
-        </p:spPr>
-        <p:style>
-          <a:lnRef idx="2">
-            <a:schemeClr val="accent1"/>
-          </a:lnRef>
-          <a:fillRef idx="0">
-            <a:schemeClr val="accent1"/>
-          </a:fillRef>
-          <a:effectRef idx="1">
-            <a:schemeClr val="accent1"/>
-          </a:effectRef>
-          <a:fontRef idx="minor">
-            <a:schemeClr val="tx1"/>
-          </a:fontRef>
-        </p:style>
-      </p:cxnSp>
-      <p:sp>
-        <p:nvSpPr>
-          <p:cNvPr id="40" name="Chevron 39"/>
-          <p:cNvSpPr/>
-          <p:nvPr/>
-        </p:nvSpPr>
-        <p:spPr>
-          <a:xfrm>
-            <a:off x="5321807" y="4471416"/>
-            <a:ext cx="164592" cy="164592"/>
-          </a:xfrm>
-          <a:prstGeom prst="chevron">
-            <a:avLst/>
-          </a:prstGeom>
-          <a:solidFill>
-            <a:srgbClr val="008D91"/>
-          </a:solidFill>
-          <a:ln>
-            <a:noFill/>
-          </a:ln>
-        </p:spPr>
-        <p:style>
-          <a:lnRef idx="1">
-            <a:schemeClr val="accent1"/>
-          </a:lnRef>
-          <a:fillRef idx="3">
-            <a:schemeClr val="accent1"/>
-          </a:fillRef>
-          <a:effectRef idx="2">
-            <a:schemeClr val="accent1"/>
-          </a:effectRef>
-          <a:fontRef idx="minor">
-            <a:schemeClr val="lt1"/>
-          </a:fontRef>
-        </p:style>
-        <p:txBody>
-          <a:bodyPr rtlCol="0" anchor="ctr"/>
-          <a:lstStyle/>
-          <a:p>
-            <a:pPr algn="ctr"/>
-          </a:p>
-        </p:txBody>
-      </p:sp>
-      <p:cxnSp>
-        <p:nvCxnSpPr>
-          <p:cNvPr id="41" name="Connector 40"/>
-          <p:cNvCxnSpPr/>
-          <p:nvPr/>
-        </p:nvCxnSpPr>
-        <p:spPr>
-          <a:xfrm>
-            <a:off x="7168896" y="4553712"/>
-            <a:ext cx="310896" cy="0"/>
-          </a:xfrm>
-          <a:prstGeom prst="line">
-            <a:avLst/>
-          </a:prstGeom>
-          <a:ln w="38100">
-            <a:solidFill>
-              <a:srgbClr val="008D91"/>
-            </a:solidFill>
-          </a:ln>
-        </p:spPr>
-        <p:style>
-          <a:lnRef idx="2">
-            <a:schemeClr val="accent1"/>
-          </a:lnRef>
-          <a:fillRef idx="0">
-            <a:schemeClr val="accent1"/>
-          </a:fillRef>
-          <a:effectRef idx="1">
-            <a:schemeClr val="accent1"/>
-          </a:effectRef>
-          <a:fontRef idx="minor">
-            <a:schemeClr val="tx1"/>
-          </a:fontRef>
-        </p:style>
-      </p:cxnSp>
-      <p:sp>
-        <p:nvSpPr>
-          <p:cNvPr id="42" name="Chevron 41"/>
-          <p:cNvSpPr/>
-          <p:nvPr/>
-        </p:nvSpPr>
-        <p:spPr>
-          <a:xfrm>
-            <a:off x="7379208" y="4471416"/>
-            <a:ext cx="164592" cy="164592"/>
-          </a:xfrm>
-          <a:prstGeom prst="chevron">
-            <a:avLst/>
-          </a:prstGeom>
-          <a:solidFill>
-            <a:srgbClr val="008D91"/>
-          </a:solidFill>
-          <a:ln>
-            <a:noFill/>
-          </a:ln>
-        </p:spPr>
-        <p:style>
-          <a:lnRef idx="1">
-            <a:schemeClr val="accent1"/>
-          </a:lnRef>
-          <a:fillRef idx="3">
-            <a:schemeClr val="accent1"/>
-          </a:fillRef>
-          <a:effectRef idx="2">
-            <a:schemeClr val="accent1"/>
-          </a:effectRef>
-          <a:fontRef idx="minor">
-            <a:schemeClr val="lt1"/>
-          </a:fontRef>
-        </p:style>
-        <p:txBody>
-          <a:bodyPr rtlCol="0" anchor="ctr"/>
-          <a:lstStyle/>
-          <a:p>
-            <a:pPr algn="ctr"/>
-          </a:p>
-        </p:txBody>
-      </p:sp>
-      <p:cxnSp>
-        <p:nvCxnSpPr>
-          <p:cNvPr id="43" name="Connector 42"/>
-          <p:cNvCxnSpPr/>
-          <p:nvPr/>
-        </p:nvCxnSpPr>
-        <p:spPr>
-          <a:xfrm>
-            <a:off x="9217152" y="4553712"/>
-            <a:ext cx="320040" cy="0"/>
-          </a:xfrm>
-          <a:prstGeom prst="line">
-            <a:avLst/>
-          </a:prstGeom>
-          <a:ln w="38100">
-            <a:solidFill>
-              <a:srgbClr val="008D91"/>
-            </a:solidFill>
-          </a:ln>
-        </p:spPr>
-        <p:style>
-          <a:lnRef idx="2">
-            <a:schemeClr val="accent1"/>
-          </a:lnRef>
-          <a:fillRef idx="0">
-            <a:schemeClr val="accent1"/>
-          </a:fillRef>
-          <a:effectRef idx="1">
-            <a:schemeClr val="accent1"/>
-          </a:effectRef>
-          <a:fontRef idx="minor">
-            <a:schemeClr val="tx1"/>
-          </a:fontRef>
-        </p:style>
-      </p:cxnSp>
-      <p:sp>
-        <p:nvSpPr>
-          <p:cNvPr id="44" name="Chevron 43"/>
-          <p:cNvSpPr/>
-          <p:nvPr/>
-        </p:nvSpPr>
-        <p:spPr>
-          <a:xfrm>
-            <a:off x="9436608" y="4471416"/>
-            <a:ext cx="164592" cy="164592"/>
-          </a:xfrm>
-          <a:prstGeom prst="chevron">
-            <a:avLst/>
-          </a:prstGeom>
-          <a:solidFill>
-            <a:srgbClr val="008D91"/>
-          </a:solidFill>
-          <a:ln>
-            <a:noFill/>
-          </a:ln>
-        </p:spPr>
-        <p:style>
-          <a:lnRef idx="1">
-            <a:schemeClr val="accent1"/>
-          </a:lnRef>
-          <a:fillRef idx="3">
-            <a:schemeClr val="accent1"/>
-          </a:fillRef>
-          <a:effectRef idx="2">
-            <a:schemeClr val="accent1"/>
-          </a:effectRef>
-          <a:fontRef idx="minor">
-            <a:schemeClr val="lt1"/>
-          </a:fontRef>
-        </p:style>
-        <p:txBody>
-          <a:bodyPr rtlCol="0" anchor="ctr"/>
-          <a:lstStyle/>
-          <a:p>
-            <a:pPr algn="ctr"/>
-          </a:p>
-        </p:txBody>
-      </p:sp>
-      <p:sp>
-        <p:nvSpPr>
-          <p:cNvPr id="45" name="TextBox 44"/>
-          <p:cNvSpPr txBox="1"/>
-          <p:nvPr/>
-        </p:nvSpPr>
-        <p:spPr>
-          <a:xfrm>
-            <a:off x="731520" y="5715000"/>
-            <a:ext cx="10607040" cy="411480"/>
+              <a:defRPr sz="2100" b="1">
+                <a:solidFill>
+                  <a:srgbClr val="FFFFFF"/>
+                </a:solidFill>
+                <a:latin typeface="Arial"/>
+              </a:defRPr>
+            </a:pPr>
+            <a:r>
+              <a:t>Turbines → substations → grid</a:t>
+            </a:r>
+          </a:p>
+        </p:txBody>
+      </p:sp>
+      <p:sp>
+        <p:nvSpPr>
+          <p:cNvPr id="20" name="TextBox 19"/>
+          <p:cNvSpPr txBox="1"/>
+          <p:nvPr/>
+        </p:nvSpPr>
+        <p:spPr>
+          <a:xfrm>
+            <a:off x="731520" y="5980176"/>
+            <a:ext cx="10744200" cy="292608"/>
           </a:xfrm>
           <a:prstGeom prst="rect">
             <a:avLst/>
@@ -9761,7 +8746,7 @@
               <a:spcAft>
                 <a:spcPts val="500"/>
               </a:spcAft>
-              <a:defRPr sz="1600" b="0">
+              <a:defRPr sz="1200" b="0">
                 <a:solidFill>
                   <a:srgbClr val="5C6F7E"/>
                 </a:solidFill>
@@ -9769,7 +8754,7 @@
               </a:defRPr>
             </a:pPr>
             <a:r>
-              <a:t>Original functional schematic. Approximate rated capacity is not continuous output or annual energy.</a:t>
+              <a:t>Original illustration • Natural Earth base map (public domain) • Offshore project marker is approximate.</a:t>
             </a:r>
           </a:p>
         </p:txBody>
@@ -12025,7 +11010,7 @@
               </a:defRPr>
             </a:pPr>
             <a:r>
-              <a:t>Sources: R1, R2, R3, R4</a:t>
+              <a:t>Sources: R1, R2, R3, R4, R8</a:t>
             </a:r>
           </a:p>
         </p:txBody>
@@ -12117,7 +11102,7 @@
         <p:spPr>
           <a:xfrm>
             <a:off x="1298448" y="1709928"/>
-            <a:ext cx="10149840" cy="822960"/>
+            <a:ext cx="10149840" cy="731520"/>
           </a:xfrm>
           <a:prstGeom prst="rect">
             <a:avLst/>
@@ -12134,7 +11119,7 @@
               <a:spcAft>
                 <a:spcPts val="500"/>
               </a:spcAft>
-              <a:defRPr sz="1500" b="0">
+              <a:defRPr sz="1300" b="0">
                 <a:solidFill>
                   <a:srgbClr val="183247"/>
                 </a:solidFill>
@@ -12153,7 +11138,7 @@
               <a:spcAft>
                 <a:spcPts val="500"/>
               </a:spcAft>
-              <a:defRPr sz="1500" b="0">
+              <a:defRPr sz="1300" b="0">
                 <a:solidFill>
                   <a:srgbClr val="183247"/>
                 </a:solidFill>
@@ -12177,7 +11162,7 @@
         </p:nvSpPr>
         <p:spPr>
           <a:xfrm>
-            <a:off x="640080" y="2734056"/>
+            <a:off x="640080" y="2560320"/>
             <a:ext cx="548640" cy="411480"/>
           </a:xfrm>
           <a:prstGeom prst="rect">
@@ -12216,8 +11201,8 @@
         </p:nvSpPr>
         <p:spPr>
           <a:xfrm>
-            <a:off x="1298448" y="2734056"/>
-            <a:ext cx="10149840" cy="822960"/>
+            <a:off x="1298448" y="2560320"/>
+            <a:ext cx="10149840" cy="731520"/>
           </a:xfrm>
           <a:prstGeom prst="rect">
             <a:avLst/>
@@ -12234,7 +11219,7 @@
               <a:spcAft>
                 <a:spcPts val="500"/>
               </a:spcAft>
-              <a:defRPr sz="1500" b="0">
+              <a:defRPr sz="1300" b="0">
                 <a:solidFill>
                   <a:srgbClr val="183247"/>
                 </a:solidFill>
@@ -12253,7 +11238,7 @@
               <a:spcAft>
                 <a:spcPts val="500"/>
               </a:spcAft>
-              <a:defRPr sz="1500" b="0">
+              <a:defRPr sz="1300" b="0">
                 <a:solidFill>
                   <a:srgbClr val="183247"/>
                 </a:solidFill>
@@ -12277,7 +11262,7 @@
         </p:nvSpPr>
         <p:spPr>
           <a:xfrm>
-            <a:off x="640080" y="3758184"/>
+            <a:off x="640080" y="3410712"/>
             <a:ext cx="548640" cy="411480"/>
           </a:xfrm>
           <a:prstGeom prst="rect">
@@ -12316,8 +11301,8 @@
         </p:nvSpPr>
         <p:spPr>
           <a:xfrm>
-            <a:off x="1298448" y="3758184"/>
-            <a:ext cx="10149840" cy="822960"/>
+            <a:off x="1298448" y="3410712"/>
+            <a:ext cx="10149840" cy="731520"/>
           </a:xfrm>
           <a:prstGeom prst="rect">
             <a:avLst/>
@@ -12334,7 +11319,7 @@
               <a:spcAft>
                 <a:spcPts val="500"/>
               </a:spcAft>
-              <a:defRPr sz="1500" b="0">
+              <a:defRPr sz="1300" b="0">
                 <a:solidFill>
                   <a:srgbClr val="183247"/>
                 </a:solidFill>
@@ -12353,7 +11338,7 @@
               <a:spcAft>
                 <a:spcPts val="500"/>
               </a:spcAft>
-              <a:defRPr sz="1500" b="0">
+              <a:defRPr sz="1300" b="0">
                 <a:solidFill>
                   <a:srgbClr val="183247"/>
                 </a:solidFill>
@@ -12377,7 +11362,7 @@
         </p:nvSpPr>
         <p:spPr>
           <a:xfrm>
-            <a:off x="640080" y="4782312"/>
+            <a:off x="640080" y="4261104"/>
             <a:ext cx="548640" cy="411480"/>
           </a:xfrm>
           <a:prstGeom prst="rect">
@@ -12416,8 +11401,8 @@
         </p:nvSpPr>
         <p:spPr>
           <a:xfrm>
-            <a:off x="1298448" y="4782312"/>
-            <a:ext cx="10149840" cy="822960"/>
+            <a:off x="1298448" y="4261104"/>
+            <a:ext cx="10149840" cy="731520"/>
           </a:xfrm>
           <a:prstGeom prst="rect">
             <a:avLst/>
@@ -12434,7 +11419,7 @@
               <a:spcAft>
                 <a:spcPts val="500"/>
               </a:spcAft>
-              <a:defRPr sz="1500" b="0">
+              <a:defRPr sz="1300" b="0">
                 <a:solidFill>
                   <a:srgbClr val="183247"/>
                 </a:solidFill>
@@ -12453,7 +11438,7 @@
               <a:spcAft>
                 <a:spcPts val="500"/>
               </a:spcAft>
-              <a:defRPr sz="1500" b="0">
+              <a:defRPr sz="1300" b="0">
                 <a:solidFill>
                   <a:srgbClr val="183247"/>
                 </a:solidFill>
@@ -12477,8 +11462,8 @@
         </p:nvSpPr>
         <p:spPr>
           <a:xfrm>
-            <a:off x="685800" y="5897880"/>
-            <a:ext cx="10789920" cy="329184"/>
+            <a:off x="640080" y="5111496"/>
+            <a:ext cx="548640" cy="411480"/>
           </a:xfrm>
           <a:prstGeom prst="rect">
             <a:avLst/>
@@ -12495,6 +11480,106 @@
               <a:spcAft>
                 <a:spcPts val="500"/>
               </a:spcAft>
+              <a:defRPr sz="1600" b="1">
+                <a:solidFill>
+                  <a:srgbClr val="008D91"/>
+                </a:solidFill>
+                <a:latin typeface="Arial"/>
+              </a:defRPr>
+            </a:pPr>
+            <a:r>
+              <a:t>R8</a:t>
+            </a:r>
+          </a:p>
+        </p:txBody>
+      </p:sp>
+      <p:sp>
+        <p:nvSpPr>
+          <p:cNvPr id="16" name="TextBox 15"/>
+          <p:cNvSpPr txBox="1"/>
+          <p:nvPr/>
+        </p:nvSpPr>
+        <p:spPr>
+          <a:xfrm>
+            <a:off x="1298448" y="5111496"/>
+            <a:ext cx="10149840" cy="731520"/>
+          </a:xfrm>
+          <a:prstGeom prst="rect">
+            <a:avLst/>
+          </a:prstGeom>
+          <a:noFill/>
+        </p:spPr>
+        <p:txBody>
+          <a:bodyPr wrap="square" lIns="27432" rIns="27432" tIns="18288" bIns="18288">
+            <a:spAutoFit/>
+          </a:bodyPr>
+          <a:lstStyle/>
+          <a:p>
+            <a:pPr algn="l">
+              <a:spcAft>
+                <a:spcPts val="500"/>
+              </a:spcAft>
+              <a:defRPr sz="1300" b="0">
+                <a:solidFill>
+                  <a:srgbClr val="183247"/>
+                </a:solidFill>
+                <a:latin typeface="Arial"/>
+              </a:defRPr>
+            </a:pPr>
+            <a:r>
+              <a:rPr>
+                <a:hlinkClick r:id="rId6"/>
+              </a:rPr>
+              <a:t>Natural Earth. Admin 0 – Countries, 1:50m (public-domain geographic data).</a:t>
+            </a:r>
+          </a:p>
+          <a:p>
+            <a:pPr algn="l">
+              <a:spcAft>
+                <a:spcPts val="500"/>
+              </a:spcAft>
+              <a:defRPr sz="1300" b="0">
+                <a:solidFill>
+                  <a:srgbClr val="183247"/>
+                </a:solidFill>
+                <a:latin typeface="Arial"/>
+              </a:defRPr>
+            </a:pPr>
+            <a:r>
+              <a:rPr>
+                <a:hlinkClick r:id="rId6"/>
+              </a:rPr>
+              <a:t>https://github.com/nvkelso/natural-earth-vector</a:t>
+            </a:r>
+          </a:p>
+        </p:txBody>
+      </p:sp>
+      <p:sp>
+        <p:nvSpPr>
+          <p:cNvPr id="17" name="TextBox 16"/>
+          <p:cNvSpPr txBox="1"/>
+          <p:nvPr/>
+        </p:nvSpPr>
+        <p:spPr>
+          <a:xfrm>
+            <a:off x="685800" y="6117336"/>
+            <a:ext cx="10789920" cy="283464"/>
+          </a:xfrm>
+          <a:prstGeom prst="rect">
+            <a:avLst/>
+          </a:prstGeom>
+          <a:noFill/>
+        </p:spPr>
+        <p:txBody>
+          <a:bodyPr wrap="square" lIns="27432" rIns="27432" tIns="18288" bIns="18288">
+            <a:spAutoFit/>
+          </a:bodyPr>
+          <a:lstStyle/>
+          <a:p>
+            <a:pPr algn="l">
+              <a:spcAft>
+                <a:spcPts val="500"/>
+              </a:spcAft>
               <a:defRPr sz="1100" b="0">
                 <a:solidFill>
                   <a:srgbClr val="5C6F7E"/>
@@ -12503,7 +11588,7 @@
               </a:defRPr>
             </a:pPr>
             <a:r>
-              <a:t>External URLs could not be opened in this environment; verify links before submission. Figures retain their publication years.</a:t>
+              <a:t>Data years: end-2024 capacity (IRENA 2025); life-cycle emissions (IPCC 2014). Map: Natural Earth, public domain.</a:t>
             </a:r>
           </a:p>
         </p:txBody>
@@ -13275,8 +12360,8 @@
         </p:nvSpPr>
         <p:spPr>
           <a:xfrm>
-            <a:off x="685800" y="5897880"/>
-            <a:ext cx="10789920" cy="329184"/>
+            <a:off x="685800" y="6117336"/>
+            <a:ext cx="10789920" cy="283464"/>
           </a:xfrm>
           <a:prstGeom prst="rect">
             <a:avLst/>
@@ -13301,7 +12386,7 @@
               </a:defRPr>
             </a:pPr>
             <a:r>
-              <a:t>External URLs could not be opened in this environment; verify links before submission. Figures retain their publication years.</a:t>
+              <a:t>Data years: end-2024 capacity (IRENA 2025); life-cycle emissions (IPCC 2014). Map: Natural Earth, public domain.</a:t>
             </a:r>
           </a:p>
         </p:txBody>
@@ -18779,7 +17864,7 @@
               </a:defRPr>
             </a:pPr>
             <a:r>
-              <a:t>Control protects the machine and improves capture</a:t>
+              <a:t>From wind speed to electrical output</a:t>
             </a:r>
           </a:p>
         </p:txBody>
@@ -18818,7 +17903,7 @@
               </a:defRPr>
             </a:pPr>
             <a:r>
-              <a:t>Pitch, yaw and plant control have different jobs</a:t>
+              <a:t>An illustrative power curve connects control to performance</a:t>
             </a:r>
           </a:p>
         </p:txBody>
@@ -18942,14 +18027,3237 @@
       </p:sp>
       <p:sp>
         <p:nvSpPr>
-          <p:cNvPr id="8" name="Rounded Rectangle 7"/>
+          <p:cNvPr id="8" name="Rectangle 7"/>
           <p:cNvSpPr/>
           <p:nvPr/>
         </p:nvSpPr>
         <p:spPr>
           <a:xfrm>
-            <a:off x="594360" y="1783080"/>
-            <a:ext cx="3584448" cy="3127248"/>
+            <a:off x="1124712" y="2185415"/>
+            <a:ext cx="674827" cy="3090672"/>
+          </a:xfrm>
+          <a:prstGeom prst="rect">
+            <a:avLst/>
+          </a:prstGeom>
+          <a:solidFill>
+            <a:srgbClr val="E5EDF3"/>
+          </a:solidFill>
+          <a:ln>
+            <a:noFill/>
+          </a:ln>
+        </p:spPr>
+        <p:style>
+          <a:lnRef idx="1">
+            <a:schemeClr val="accent1"/>
+          </a:lnRef>
+          <a:fillRef idx="3">
+            <a:schemeClr val="accent1"/>
+          </a:fillRef>
+          <a:effectRef idx="2">
+            <a:schemeClr val="accent1"/>
+          </a:effectRef>
+          <a:fontRef idx="minor">
+            <a:schemeClr val="lt1"/>
+          </a:fontRef>
+        </p:style>
+        <p:txBody>
+          <a:bodyPr rtlCol="0" anchor="ctr"/>
+          <a:lstStyle/>
+          <a:p>
+            <a:pPr algn="ctr"/>
+          </a:p>
+        </p:txBody>
+      </p:sp>
+      <p:sp>
+        <p:nvSpPr>
+          <p:cNvPr id="9" name="Rectangle 8"/>
+          <p:cNvSpPr/>
+          <p:nvPr/>
+        </p:nvSpPr>
+        <p:spPr>
+          <a:xfrm>
+            <a:off x="1799539" y="2185415"/>
+            <a:ext cx="2024481" cy="3090672"/>
+          </a:xfrm>
+          <a:prstGeom prst="rect">
+            <a:avLst/>
+          </a:prstGeom>
+          <a:solidFill>
+            <a:srgbClr val="E6F3EC"/>
+          </a:solidFill>
+          <a:ln>
+            <a:noFill/>
+          </a:ln>
+        </p:spPr>
+        <p:style>
+          <a:lnRef idx="1">
+            <a:schemeClr val="accent1"/>
+          </a:lnRef>
+          <a:fillRef idx="3">
+            <a:schemeClr val="accent1"/>
+          </a:fillRef>
+          <a:effectRef idx="2">
+            <a:schemeClr val="accent1"/>
+          </a:effectRef>
+          <a:fontRef idx="minor">
+            <a:schemeClr val="lt1"/>
+          </a:fontRef>
+        </p:style>
+        <p:txBody>
+          <a:bodyPr rtlCol="0" anchor="ctr"/>
+          <a:lstStyle/>
+          <a:p>
+            <a:pPr algn="ctr"/>
+          </a:p>
+        </p:txBody>
+      </p:sp>
+      <p:sp>
+        <p:nvSpPr>
+          <p:cNvPr id="10" name="Rectangle 9"/>
+          <p:cNvSpPr/>
+          <p:nvPr/>
+        </p:nvSpPr>
+        <p:spPr>
+          <a:xfrm>
+            <a:off x="3824020" y="2185415"/>
+            <a:ext cx="2924251" cy="3090672"/>
+          </a:xfrm>
+          <a:prstGeom prst="rect">
+            <a:avLst/>
+          </a:prstGeom>
+          <a:solidFill>
+            <a:srgbClr val="E0F1F5"/>
+          </a:solidFill>
+          <a:ln>
+            <a:noFill/>
+          </a:ln>
+        </p:spPr>
+        <p:style>
+          <a:lnRef idx="1">
+            <a:schemeClr val="accent1"/>
+          </a:lnRef>
+          <a:fillRef idx="3">
+            <a:schemeClr val="accent1"/>
+          </a:fillRef>
+          <a:effectRef idx="2">
+            <a:schemeClr val="accent1"/>
+          </a:effectRef>
+          <a:fontRef idx="minor">
+            <a:schemeClr val="lt1"/>
+          </a:fontRef>
+        </p:style>
+        <p:txBody>
+          <a:bodyPr rtlCol="0" anchor="ctr"/>
+          <a:lstStyle/>
+          <a:p>
+            <a:pPr algn="ctr"/>
+          </a:p>
+        </p:txBody>
+      </p:sp>
+      <p:sp>
+        <p:nvSpPr>
+          <p:cNvPr id="11" name="Rectangle 10"/>
+          <p:cNvSpPr/>
+          <p:nvPr/>
+        </p:nvSpPr>
+        <p:spPr>
+          <a:xfrm>
+            <a:off x="6748272" y="2185415"/>
+            <a:ext cx="1124711" cy="3090672"/>
+          </a:xfrm>
+          <a:prstGeom prst="rect">
+            <a:avLst/>
+          </a:prstGeom>
+          <a:solidFill>
+            <a:srgbClr val="E5EDF3"/>
+          </a:solidFill>
+          <a:ln>
+            <a:noFill/>
+          </a:ln>
+        </p:spPr>
+        <p:style>
+          <a:lnRef idx="1">
+            <a:schemeClr val="accent1"/>
+          </a:lnRef>
+          <a:fillRef idx="3">
+            <a:schemeClr val="accent1"/>
+          </a:fillRef>
+          <a:effectRef idx="2">
+            <a:schemeClr val="accent1"/>
+          </a:effectRef>
+          <a:fontRef idx="minor">
+            <a:schemeClr val="lt1"/>
+          </a:fontRef>
+        </p:style>
+        <p:txBody>
+          <a:bodyPr rtlCol="0" anchor="ctr"/>
+          <a:lstStyle/>
+          <a:p>
+            <a:pPr algn="ctr"/>
+          </a:p>
+        </p:txBody>
+      </p:sp>
+      <p:cxnSp>
+        <p:nvCxnSpPr>
+          <p:cNvPr id="12" name="Connector 11"/>
+          <p:cNvCxnSpPr/>
+          <p:nvPr/>
+        </p:nvCxnSpPr>
+        <p:spPr>
+          <a:xfrm>
+            <a:off x="1124712" y="5276088"/>
+            <a:ext cx="6748271" cy="0"/>
+          </a:xfrm>
+          <a:prstGeom prst="line">
+            <a:avLst/>
+          </a:prstGeom>
+          <a:ln w="9525">
+            <a:solidFill>
+              <a:srgbClr val="B8CDD9"/>
+            </a:solidFill>
+          </a:ln>
+        </p:spPr>
+        <p:style>
+          <a:lnRef idx="2">
+            <a:schemeClr val="accent1"/>
+          </a:lnRef>
+          <a:fillRef idx="0">
+            <a:schemeClr val="accent1"/>
+          </a:fillRef>
+          <a:effectRef idx="1">
+            <a:schemeClr val="accent1"/>
+          </a:effectRef>
+          <a:fontRef idx="minor">
+            <a:schemeClr val="tx1"/>
+          </a:fontRef>
+        </p:style>
+      </p:cxnSp>
+      <p:sp>
+        <p:nvSpPr>
+          <p:cNvPr id="13" name="TextBox 12"/>
+          <p:cNvSpPr txBox="1"/>
+          <p:nvPr/>
+        </p:nvSpPr>
+        <p:spPr>
+          <a:xfrm>
+            <a:off x="612648" y="5166359"/>
+            <a:ext cx="384048" cy="329184"/>
+          </a:xfrm>
+          <a:prstGeom prst="rect">
+            <a:avLst/>
+          </a:prstGeom>
+          <a:noFill/>
+        </p:spPr>
+        <p:txBody>
+          <a:bodyPr wrap="square" lIns="27432" rIns="27432" tIns="18288" bIns="18288">
+            <a:spAutoFit/>
+          </a:bodyPr>
+          <a:lstStyle/>
+          <a:p>
+            <a:pPr algn="r">
+              <a:spcAft>
+                <a:spcPts val="500"/>
+              </a:spcAft>
+              <a:defRPr sz="1400" b="0">
+                <a:solidFill>
+                  <a:srgbClr val="5C6F7E"/>
+                </a:solidFill>
+                <a:latin typeface="Arial"/>
+              </a:defRPr>
+            </a:pPr>
+            <a:r>
+              <a:t>0</a:t>
+            </a:r>
+          </a:p>
+        </p:txBody>
+      </p:sp>
+      <p:cxnSp>
+        <p:nvCxnSpPr>
+          <p:cNvPr id="14" name="Connector 13"/>
+          <p:cNvCxnSpPr/>
+          <p:nvPr/>
+        </p:nvCxnSpPr>
+        <p:spPr>
+          <a:xfrm>
+            <a:off x="1124712" y="3730752"/>
+            <a:ext cx="6748271" cy="0"/>
+          </a:xfrm>
+          <a:prstGeom prst="line">
+            <a:avLst/>
+          </a:prstGeom>
+          <a:ln w="9525">
+            <a:solidFill>
+              <a:srgbClr val="B8CDD9"/>
+            </a:solidFill>
+          </a:ln>
+        </p:spPr>
+        <p:style>
+          <a:lnRef idx="2">
+            <a:schemeClr val="accent1"/>
+          </a:lnRef>
+          <a:fillRef idx="0">
+            <a:schemeClr val="accent1"/>
+          </a:fillRef>
+          <a:effectRef idx="1">
+            <a:schemeClr val="accent1"/>
+          </a:effectRef>
+          <a:fontRef idx="minor">
+            <a:schemeClr val="tx1"/>
+          </a:fontRef>
+        </p:style>
+      </p:cxnSp>
+      <p:sp>
+        <p:nvSpPr>
+          <p:cNvPr id="15" name="TextBox 14"/>
+          <p:cNvSpPr txBox="1"/>
+          <p:nvPr/>
+        </p:nvSpPr>
+        <p:spPr>
+          <a:xfrm>
+            <a:off x="612648" y="3621024"/>
+            <a:ext cx="384048" cy="329184"/>
+          </a:xfrm>
+          <a:prstGeom prst="rect">
+            <a:avLst/>
+          </a:prstGeom>
+          <a:noFill/>
+        </p:spPr>
+        <p:txBody>
+          <a:bodyPr wrap="square" lIns="27432" rIns="27432" tIns="18288" bIns="18288">
+            <a:spAutoFit/>
+          </a:bodyPr>
+          <a:lstStyle/>
+          <a:p>
+            <a:pPr algn="r">
+              <a:spcAft>
+                <a:spcPts val="500"/>
+              </a:spcAft>
+              <a:defRPr sz="1400" b="0">
+                <a:solidFill>
+                  <a:srgbClr val="5C6F7E"/>
+                </a:solidFill>
+                <a:latin typeface="Arial"/>
+              </a:defRPr>
+            </a:pPr>
+            <a:r>
+              <a:t>0.5</a:t>
+            </a:r>
+          </a:p>
+        </p:txBody>
+      </p:sp>
+      <p:cxnSp>
+        <p:nvCxnSpPr>
+          <p:cNvPr id="16" name="Connector 15"/>
+          <p:cNvCxnSpPr/>
+          <p:nvPr/>
+        </p:nvCxnSpPr>
+        <p:spPr>
+          <a:xfrm>
+            <a:off x="1124712" y="2185415"/>
+            <a:ext cx="6748271" cy="0"/>
+          </a:xfrm>
+          <a:prstGeom prst="line">
+            <a:avLst/>
+          </a:prstGeom>
+          <a:ln w="9525">
+            <a:solidFill>
+              <a:srgbClr val="B8CDD9"/>
+            </a:solidFill>
+          </a:ln>
+        </p:spPr>
+        <p:style>
+          <a:lnRef idx="2">
+            <a:schemeClr val="accent1"/>
+          </a:lnRef>
+          <a:fillRef idx="0">
+            <a:schemeClr val="accent1"/>
+          </a:fillRef>
+          <a:effectRef idx="1">
+            <a:schemeClr val="accent1"/>
+          </a:effectRef>
+          <a:fontRef idx="minor">
+            <a:schemeClr val="tx1"/>
+          </a:fontRef>
+        </p:style>
+      </p:cxnSp>
+      <p:sp>
+        <p:nvSpPr>
+          <p:cNvPr id="17" name="TextBox 16"/>
+          <p:cNvSpPr txBox="1"/>
+          <p:nvPr/>
+        </p:nvSpPr>
+        <p:spPr>
+          <a:xfrm>
+            <a:off x="612648" y="2075687"/>
+            <a:ext cx="384048" cy="329184"/>
+          </a:xfrm>
+          <a:prstGeom prst="rect">
+            <a:avLst/>
+          </a:prstGeom>
+          <a:noFill/>
+        </p:spPr>
+        <p:txBody>
+          <a:bodyPr wrap="square" lIns="27432" rIns="27432" tIns="18288" bIns="18288">
+            <a:spAutoFit/>
+          </a:bodyPr>
+          <a:lstStyle/>
+          <a:p>
+            <a:pPr algn="r">
+              <a:spcAft>
+                <a:spcPts val="500"/>
+              </a:spcAft>
+              <a:defRPr sz="1400" b="0">
+                <a:solidFill>
+                  <a:srgbClr val="5C6F7E"/>
+                </a:solidFill>
+                <a:latin typeface="Arial"/>
+              </a:defRPr>
+            </a:pPr>
+            <a:r>
+              <a:t>1</a:t>
+            </a:r>
+          </a:p>
+        </p:txBody>
+      </p:sp>
+      <p:cxnSp>
+        <p:nvCxnSpPr>
+          <p:cNvPr id="18" name="Connector 17"/>
+          <p:cNvCxnSpPr/>
+          <p:nvPr/>
+        </p:nvCxnSpPr>
+        <p:spPr>
+          <a:xfrm>
+            <a:off x="1124712" y="2212847"/>
+            <a:ext cx="0" cy="3063241"/>
+          </a:xfrm>
+          <a:prstGeom prst="line">
+            <a:avLst/>
+          </a:prstGeom>
+          <a:ln w="16510">
+            <a:solidFill>
+              <a:srgbClr val="5C6F7E"/>
+            </a:solidFill>
+          </a:ln>
+        </p:spPr>
+        <p:style>
+          <a:lnRef idx="2">
+            <a:schemeClr val="accent1"/>
+          </a:lnRef>
+          <a:fillRef idx="0">
+            <a:schemeClr val="accent1"/>
+          </a:fillRef>
+          <a:effectRef idx="1">
+            <a:schemeClr val="accent1"/>
+          </a:effectRef>
+          <a:fontRef idx="minor">
+            <a:schemeClr val="tx1"/>
+          </a:fontRef>
+        </p:style>
+      </p:cxnSp>
+      <p:cxnSp>
+        <p:nvCxnSpPr>
+          <p:cNvPr id="19" name="Connector 18"/>
+          <p:cNvCxnSpPr/>
+          <p:nvPr/>
+        </p:nvCxnSpPr>
+        <p:spPr>
+          <a:xfrm>
+            <a:off x="1124712" y="5276088"/>
+            <a:ext cx="6748271" cy="0"/>
+          </a:xfrm>
+          <a:prstGeom prst="line">
+            <a:avLst/>
+          </a:prstGeom>
+          <a:ln w="16510">
+            <a:solidFill>
+              <a:srgbClr val="5C6F7E"/>
+            </a:solidFill>
+          </a:ln>
+        </p:spPr>
+        <p:style>
+          <a:lnRef idx="2">
+            <a:schemeClr val="accent1"/>
+          </a:lnRef>
+          <a:fillRef idx="0">
+            <a:schemeClr val="accent1"/>
+          </a:fillRef>
+          <a:effectRef idx="1">
+            <a:schemeClr val="accent1"/>
+          </a:effectRef>
+          <a:fontRef idx="minor">
+            <a:schemeClr val="tx1"/>
+          </a:fontRef>
+        </p:style>
+      </p:cxnSp>
+      <p:cxnSp>
+        <p:nvCxnSpPr>
+          <p:cNvPr id="20" name="Connector 19"/>
+          <p:cNvCxnSpPr/>
+          <p:nvPr/>
+        </p:nvCxnSpPr>
+        <p:spPr>
+          <a:xfrm>
+            <a:off x="1124712" y="5276088"/>
+            <a:ext cx="0" cy="64008"/>
+          </a:xfrm>
+          <a:prstGeom prst="line">
+            <a:avLst/>
+          </a:prstGeom>
+          <a:ln w="12700">
+            <a:solidFill>
+              <a:srgbClr val="5C6F7E"/>
+            </a:solidFill>
+          </a:ln>
+        </p:spPr>
+        <p:style>
+          <a:lnRef idx="2">
+            <a:schemeClr val="accent1"/>
+          </a:lnRef>
+          <a:fillRef idx="0">
+            <a:schemeClr val="accent1"/>
+          </a:fillRef>
+          <a:effectRef idx="1">
+            <a:schemeClr val="accent1"/>
+          </a:effectRef>
+          <a:fontRef idx="minor">
+            <a:schemeClr val="tx1"/>
+          </a:fontRef>
+        </p:style>
+      </p:cxnSp>
+      <p:sp>
+        <p:nvSpPr>
+          <p:cNvPr id="21" name="TextBox 20"/>
+          <p:cNvSpPr txBox="1"/>
+          <p:nvPr/>
+        </p:nvSpPr>
+        <p:spPr>
+          <a:xfrm>
+            <a:off x="896112" y="5376672"/>
+            <a:ext cx="457200" cy="274320"/>
+          </a:xfrm>
+          <a:prstGeom prst="rect">
+            <a:avLst/>
+          </a:prstGeom>
+          <a:noFill/>
+        </p:spPr>
+        <p:txBody>
+          <a:bodyPr wrap="square" lIns="27432" rIns="27432" tIns="18288" bIns="18288">
+            <a:spAutoFit/>
+          </a:bodyPr>
+          <a:lstStyle/>
+          <a:p>
+            <a:pPr algn="ctr">
+              <a:spcAft>
+                <a:spcPts val="500"/>
+              </a:spcAft>
+              <a:defRPr sz="1400" b="0">
+                <a:solidFill>
+                  <a:srgbClr val="5C6F7E"/>
+                </a:solidFill>
+                <a:latin typeface="Arial"/>
+              </a:defRPr>
+            </a:pPr>
+            <a:r>
+              <a:t>0</a:t>
+            </a:r>
+          </a:p>
+        </p:txBody>
+      </p:sp>
+      <p:cxnSp>
+        <p:nvCxnSpPr>
+          <p:cNvPr id="22" name="Connector 21"/>
+          <p:cNvCxnSpPr/>
+          <p:nvPr/>
+        </p:nvCxnSpPr>
+        <p:spPr>
+          <a:xfrm>
+            <a:off x="1799539" y="5276088"/>
+            <a:ext cx="0" cy="64008"/>
+          </a:xfrm>
+          <a:prstGeom prst="line">
+            <a:avLst/>
+          </a:prstGeom>
+          <a:ln w="12700">
+            <a:solidFill>
+              <a:srgbClr val="5C6F7E"/>
+            </a:solidFill>
+          </a:ln>
+        </p:spPr>
+        <p:style>
+          <a:lnRef idx="2">
+            <a:schemeClr val="accent1"/>
+          </a:lnRef>
+          <a:fillRef idx="0">
+            <a:schemeClr val="accent1"/>
+          </a:fillRef>
+          <a:effectRef idx="1">
+            <a:schemeClr val="accent1"/>
+          </a:effectRef>
+          <a:fontRef idx="minor">
+            <a:schemeClr val="tx1"/>
+          </a:fontRef>
+        </p:style>
+      </p:cxnSp>
+      <p:sp>
+        <p:nvSpPr>
+          <p:cNvPr id="23" name="TextBox 22"/>
+          <p:cNvSpPr txBox="1"/>
+          <p:nvPr/>
+        </p:nvSpPr>
+        <p:spPr>
+          <a:xfrm>
+            <a:off x="1570939" y="5376672"/>
+            <a:ext cx="457200" cy="274320"/>
+          </a:xfrm>
+          <a:prstGeom prst="rect">
+            <a:avLst/>
+          </a:prstGeom>
+          <a:noFill/>
+        </p:spPr>
+        <p:txBody>
+          <a:bodyPr wrap="square" lIns="27432" rIns="27432" tIns="18288" bIns="18288">
+            <a:spAutoFit/>
+          </a:bodyPr>
+          <a:lstStyle/>
+          <a:p>
+            <a:pPr algn="ctr">
+              <a:spcAft>
+                <a:spcPts val="500"/>
+              </a:spcAft>
+              <a:defRPr sz="1400" b="0">
+                <a:solidFill>
+                  <a:srgbClr val="5C6F7E"/>
+                </a:solidFill>
+                <a:latin typeface="Arial"/>
+              </a:defRPr>
+            </a:pPr>
+            <a:r>
+              <a:t>3</a:t>
+            </a:r>
+          </a:p>
+        </p:txBody>
+      </p:sp>
+      <p:cxnSp>
+        <p:nvCxnSpPr>
+          <p:cNvPr id="24" name="Connector 23"/>
+          <p:cNvCxnSpPr/>
+          <p:nvPr/>
+        </p:nvCxnSpPr>
+        <p:spPr>
+          <a:xfrm>
+            <a:off x="3824020" y="5276088"/>
+            <a:ext cx="0" cy="64008"/>
+          </a:xfrm>
+          <a:prstGeom prst="line">
+            <a:avLst/>
+          </a:prstGeom>
+          <a:ln w="12700">
+            <a:solidFill>
+              <a:srgbClr val="5C6F7E"/>
+            </a:solidFill>
+          </a:ln>
+        </p:spPr>
+        <p:style>
+          <a:lnRef idx="2">
+            <a:schemeClr val="accent1"/>
+          </a:lnRef>
+          <a:fillRef idx="0">
+            <a:schemeClr val="accent1"/>
+          </a:fillRef>
+          <a:effectRef idx="1">
+            <a:schemeClr val="accent1"/>
+          </a:effectRef>
+          <a:fontRef idx="minor">
+            <a:schemeClr val="tx1"/>
+          </a:fontRef>
+        </p:style>
+      </p:cxnSp>
+      <p:sp>
+        <p:nvSpPr>
+          <p:cNvPr id="25" name="TextBox 24"/>
+          <p:cNvSpPr txBox="1"/>
+          <p:nvPr/>
+        </p:nvSpPr>
+        <p:spPr>
+          <a:xfrm>
+            <a:off x="3595420" y="5376672"/>
+            <a:ext cx="457200" cy="274320"/>
+          </a:xfrm>
+          <a:prstGeom prst="rect">
+            <a:avLst/>
+          </a:prstGeom>
+          <a:noFill/>
+        </p:spPr>
+        <p:txBody>
+          <a:bodyPr wrap="square" lIns="27432" rIns="27432" tIns="18288" bIns="18288">
+            <a:spAutoFit/>
+          </a:bodyPr>
+          <a:lstStyle/>
+          <a:p>
+            <a:pPr algn="ctr">
+              <a:spcAft>
+                <a:spcPts val="500"/>
+              </a:spcAft>
+              <a:defRPr sz="1400" b="0">
+                <a:solidFill>
+                  <a:srgbClr val="5C6F7E"/>
+                </a:solidFill>
+                <a:latin typeface="Arial"/>
+              </a:defRPr>
+            </a:pPr>
+            <a:r>
+              <a:t>12</a:t>
+            </a:r>
+          </a:p>
+        </p:txBody>
+      </p:sp>
+      <p:cxnSp>
+        <p:nvCxnSpPr>
+          <p:cNvPr id="26" name="Connector 25"/>
+          <p:cNvCxnSpPr/>
+          <p:nvPr/>
+        </p:nvCxnSpPr>
+        <p:spPr>
+          <a:xfrm>
+            <a:off x="6748272" y="5276088"/>
+            <a:ext cx="0" cy="64008"/>
+          </a:xfrm>
+          <a:prstGeom prst="line">
+            <a:avLst/>
+          </a:prstGeom>
+          <a:ln w="12700">
+            <a:solidFill>
+              <a:srgbClr val="5C6F7E"/>
+            </a:solidFill>
+          </a:ln>
+        </p:spPr>
+        <p:style>
+          <a:lnRef idx="2">
+            <a:schemeClr val="accent1"/>
+          </a:lnRef>
+          <a:fillRef idx="0">
+            <a:schemeClr val="accent1"/>
+          </a:fillRef>
+          <a:effectRef idx="1">
+            <a:schemeClr val="accent1"/>
+          </a:effectRef>
+          <a:fontRef idx="minor">
+            <a:schemeClr val="tx1"/>
+          </a:fontRef>
+        </p:style>
+      </p:cxnSp>
+      <p:sp>
+        <p:nvSpPr>
+          <p:cNvPr id="27" name="TextBox 26"/>
+          <p:cNvSpPr txBox="1"/>
+          <p:nvPr/>
+        </p:nvSpPr>
+        <p:spPr>
+          <a:xfrm>
+            <a:off x="6519672" y="5376672"/>
+            <a:ext cx="457200" cy="274320"/>
+          </a:xfrm>
+          <a:prstGeom prst="rect">
+            <a:avLst/>
+          </a:prstGeom>
+          <a:noFill/>
+        </p:spPr>
+        <p:txBody>
+          <a:bodyPr wrap="square" lIns="27432" rIns="27432" tIns="18288" bIns="18288">
+            <a:spAutoFit/>
+          </a:bodyPr>
+          <a:lstStyle/>
+          <a:p>
+            <a:pPr algn="ctr">
+              <a:spcAft>
+                <a:spcPts val="500"/>
+              </a:spcAft>
+              <a:defRPr sz="1400" b="0">
+                <a:solidFill>
+                  <a:srgbClr val="5C6F7E"/>
+                </a:solidFill>
+                <a:latin typeface="Arial"/>
+              </a:defRPr>
+            </a:pPr>
+            <a:r>
+              <a:t>25</a:t>
+            </a:r>
+          </a:p>
+        </p:txBody>
+      </p:sp>
+      <p:cxnSp>
+        <p:nvCxnSpPr>
+          <p:cNvPr id="28" name="Connector 27"/>
+          <p:cNvCxnSpPr/>
+          <p:nvPr/>
+        </p:nvCxnSpPr>
+        <p:spPr>
+          <a:xfrm>
+            <a:off x="7872983" y="5276088"/>
+            <a:ext cx="0" cy="64008"/>
+          </a:xfrm>
+          <a:prstGeom prst="line">
+            <a:avLst/>
+          </a:prstGeom>
+          <a:ln w="12700">
+            <a:solidFill>
+              <a:srgbClr val="5C6F7E"/>
+            </a:solidFill>
+          </a:ln>
+        </p:spPr>
+        <p:style>
+          <a:lnRef idx="2">
+            <a:schemeClr val="accent1"/>
+          </a:lnRef>
+          <a:fillRef idx="0">
+            <a:schemeClr val="accent1"/>
+          </a:fillRef>
+          <a:effectRef idx="1">
+            <a:schemeClr val="accent1"/>
+          </a:effectRef>
+          <a:fontRef idx="minor">
+            <a:schemeClr val="tx1"/>
+          </a:fontRef>
+        </p:style>
+      </p:cxnSp>
+      <p:sp>
+        <p:nvSpPr>
+          <p:cNvPr id="29" name="TextBox 28"/>
+          <p:cNvSpPr txBox="1"/>
+          <p:nvPr/>
+        </p:nvSpPr>
+        <p:spPr>
+          <a:xfrm>
+            <a:off x="7644383" y="5376672"/>
+            <a:ext cx="457200" cy="274320"/>
+          </a:xfrm>
+          <a:prstGeom prst="rect">
+            <a:avLst/>
+          </a:prstGeom>
+          <a:noFill/>
+        </p:spPr>
+        <p:txBody>
+          <a:bodyPr wrap="square" lIns="27432" rIns="27432" tIns="18288" bIns="18288">
+            <a:spAutoFit/>
+          </a:bodyPr>
+          <a:lstStyle/>
+          <a:p>
+            <a:pPr algn="ctr">
+              <a:spcAft>
+                <a:spcPts val="500"/>
+              </a:spcAft>
+              <a:defRPr sz="1400" b="0">
+                <a:solidFill>
+                  <a:srgbClr val="5C6F7E"/>
+                </a:solidFill>
+                <a:latin typeface="Arial"/>
+              </a:defRPr>
+            </a:pPr>
+            <a:r>
+              <a:t>30</a:t>
+            </a:r>
+          </a:p>
+        </p:txBody>
+      </p:sp>
+      <p:sp>
+        <p:nvSpPr>
+          <p:cNvPr id="30" name="TextBox 29"/>
+          <p:cNvSpPr txBox="1"/>
+          <p:nvPr/>
+        </p:nvSpPr>
+        <p:spPr>
+          <a:xfrm>
+            <a:off x="1097280" y="1755648"/>
+            <a:ext cx="6766560" cy="320040"/>
+          </a:xfrm>
+          <a:prstGeom prst="rect">
+            <a:avLst/>
+          </a:prstGeom>
+          <a:noFill/>
+        </p:spPr>
+        <p:txBody>
+          <a:bodyPr wrap="square" lIns="27432" rIns="27432" tIns="18288" bIns="18288">
+            <a:spAutoFit/>
+          </a:bodyPr>
+          <a:lstStyle/>
+          <a:p>
+            <a:pPr algn="l">
+              <a:spcAft>
+                <a:spcPts val="500"/>
+              </a:spcAft>
+              <a:defRPr sz="1600" b="1">
+                <a:solidFill>
+                  <a:srgbClr val="183247"/>
+                </a:solidFill>
+                <a:latin typeface="Arial"/>
+              </a:defRPr>
+            </a:pPr>
+            <a:r>
+              <a:t>Output / rated power</a:t>
+            </a:r>
+          </a:p>
+        </p:txBody>
+      </p:sp>
+      <p:sp>
+        <p:nvSpPr>
+          <p:cNvPr id="31" name="TextBox 30"/>
+          <p:cNvSpPr txBox="1"/>
+          <p:nvPr/>
+        </p:nvSpPr>
+        <p:spPr>
+          <a:xfrm>
+            <a:off x="2039112" y="5715000"/>
+            <a:ext cx="5029200" cy="310896"/>
+          </a:xfrm>
+          <a:prstGeom prst="rect">
+            <a:avLst/>
+          </a:prstGeom>
+          <a:noFill/>
+        </p:spPr>
+        <p:txBody>
+          <a:bodyPr wrap="square" lIns="27432" rIns="27432" tIns="18288" bIns="18288">
+            <a:spAutoFit/>
+          </a:bodyPr>
+          <a:lstStyle/>
+          <a:p>
+            <a:pPr algn="ctr">
+              <a:spcAft>
+                <a:spcPts val="500"/>
+              </a:spcAft>
+              <a:defRPr sz="1600" b="0">
+                <a:solidFill>
+                  <a:srgbClr val="5C6F7E"/>
+                </a:solidFill>
+                <a:latin typeface="Arial"/>
+              </a:defRPr>
+            </a:pPr>
+            <a:r>
+              <a:t>Wind speed (m/s)</a:t>
+            </a:r>
+          </a:p>
+        </p:txBody>
+      </p:sp>
+      <p:cxnSp>
+        <p:nvCxnSpPr>
+          <p:cNvPr id="32" name="Connector 31"/>
+          <p:cNvCxnSpPr/>
+          <p:nvPr/>
+        </p:nvCxnSpPr>
+        <p:spPr>
+          <a:xfrm>
+            <a:off x="1124712" y="5276088"/>
+            <a:ext cx="674827" cy="0"/>
+          </a:xfrm>
+          <a:prstGeom prst="line">
+            <a:avLst/>
+          </a:prstGeom>
+          <a:ln w="38100">
+            <a:solidFill>
+              <a:srgbClr val="008D91"/>
+            </a:solidFill>
+          </a:ln>
+        </p:spPr>
+        <p:style>
+          <a:lnRef idx="2">
+            <a:schemeClr val="accent1"/>
+          </a:lnRef>
+          <a:fillRef idx="0">
+            <a:schemeClr val="accent1"/>
+          </a:fillRef>
+          <a:effectRef idx="1">
+            <a:schemeClr val="accent1"/>
+          </a:effectRef>
+          <a:fontRef idx="minor">
+            <a:schemeClr val="tx1"/>
+          </a:fontRef>
+        </p:style>
+      </p:cxnSp>
+      <p:cxnSp>
+        <p:nvCxnSpPr>
+          <p:cNvPr id="33" name="Connector 32"/>
+          <p:cNvCxnSpPr/>
+          <p:nvPr/>
+        </p:nvCxnSpPr>
+        <p:spPr>
+          <a:xfrm flipV="1">
+            <a:off x="1799539" y="5267614"/>
+            <a:ext cx="36808" cy="8474"/>
+          </a:xfrm>
+          <a:prstGeom prst="line">
+            <a:avLst/>
+          </a:prstGeom>
+          <a:ln w="38100">
+            <a:solidFill>
+              <a:srgbClr val="008D91"/>
+            </a:solidFill>
+          </a:ln>
+        </p:spPr>
+        <p:style>
+          <a:lnRef idx="2">
+            <a:schemeClr val="accent1"/>
+          </a:lnRef>
+          <a:fillRef idx="0">
+            <a:schemeClr val="accent1"/>
+          </a:fillRef>
+          <a:effectRef idx="1">
+            <a:schemeClr val="accent1"/>
+          </a:effectRef>
+          <a:fontRef idx="minor">
+            <a:schemeClr val="tx1"/>
+          </a:fontRef>
+        </p:style>
+      </p:cxnSp>
+      <p:cxnSp>
+        <p:nvCxnSpPr>
+          <p:cNvPr id="34" name="Connector 33"/>
+          <p:cNvCxnSpPr/>
+          <p:nvPr/>
+        </p:nvCxnSpPr>
+        <p:spPr>
+          <a:xfrm flipV="1">
+            <a:off x="1836347" y="5258217"/>
+            <a:ext cx="36809" cy="9397"/>
+          </a:xfrm>
+          <a:prstGeom prst="line">
+            <a:avLst/>
+          </a:prstGeom>
+          <a:ln w="38100">
+            <a:solidFill>
+              <a:srgbClr val="008D91"/>
+            </a:solidFill>
+          </a:ln>
+        </p:spPr>
+        <p:style>
+          <a:lnRef idx="2">
+            <a:schemeClr val="accent1"/>
+          </a:lnRef>
+          <a:fillRef idx="0">
+            <a:schemeClr val="accent1"/>
+          </a:fillRef>
+          <a:effectRef idx="1">
+            <a:schemeClr val="accent1"/>
+          </a:effectRef>
+          <a:fontRef idx="minor">
+            <a:schemeClr val="tx1"/>
+          </a:fontRef>
+        </p:style>
+      </p:cxnSp>
+      <p:cxnSp>
+        <p:nvCxnSpPr>
+          <p:cNvPr id="35" name="Connector 34"/>
+          <p:cNvCxnSpPr/>
+          <p:nvPr/>
+        </p:nvCxnSpPr>
+        <p:spPr>
+          <a:xfrm flipV="1">
+            <a:off x="1873156" y="5247849"/>
+            <a:ext cx="36809" cy="10368"/>
+          </a:xfrm>
+          <a:prstGeom prst="line">
+            <a:avLst/>
+          </a:prstGeom>
+          <a:ln w="38100">
+            <a:solidFill>
+              <a:srgbClr val="008D91"/>
+            </a:solidFill>
+          </a:ln>
+        </p:spPr>
+        <p:style>
+          <a:lnRef idx="2">
+            <a:schemeClr val="accent1"/>
+          </a:lnRef>
+          <a:fillRef idx="0">
+            <a:schemeClr val="accent1"/>
+          </a:fillRef>
+          <a:effectRef idx="1">
+            <a:schemeClr val="accent1"/>
+          </a:effectRef>
+          <a:fontRef idx="minor">
+            <a:schemeClr val="tx1"/>
+          </a:fontRef>
+        </p:style>
+      </p:cxnSp>
+      <p:cxnSp>
+        <p:nvCxnSpPr>
+          <p:cNvPr id="36" name="Connector 35"/>
+          <p:cNvCxnSpPr/>
+          <p:nvPr/>
+        </p:nvCxnSpPr>
+        <p:spPr>
+          <a:xfrm flipV="1">
+            <a:off x="1909965" y="5236461"/>
+            <a:ext cx="36809" cy="11388"/>
+          </a:xfrm>
+          <a:prstGeom prst="line">
+            <a:avLst/>
+          </a:prstGeom>
+          <a:ln w="38100">
+            <a:solidFill>
+              <a:srgbClr val="008D91"/>
+            </a:solidFill>
+          </a:ln>
+        </p:spPr>
+        <p:style>
+          <a:lnRef idx="2">
+            <a:schemeClr val="accent1"/>
+          </a:lnRef>
+          <a:fillRef idx="0">
+            <a:schemeClr val="accent1"/>
+          </a:fillRef>
+          <a:effectRef idx="1">
+            <a:schemeClr val="accent1"/>
+          </a:effectRef>
+          <a:fontRef idx="minor">
+            <a:schemeClr val="tx1"/>
+          </a:fontRef>
+        </p:style>
+      </p:cxnSp>
+      <p:cxnSp>
+        <p:nvCxnSpPr>
+          <p:cNvPr id="37" name="Connector 36"/>
+          <p:cNvCxnSpPr/>
+          <p:nvPr/>
+        </p:nvCxnSpPr>
+        <p:spPr>
+          <a:xfrm flipV="1">
+            <a:off x="1946774" y="5224007"/>
+            <a:ext cx="36808" cy="12454"/>
+          </a:xfrm>
+          <a:prstGeom prst="line">
+            <a:avLst/>
+          </a:prstGeom>
+          <a:ln w="38100">
+            <a:solidFill>
+              <a:srgbClr val="008D91"/>
+            </a:solidFill>
+          </a:ln>
+        </p:spPr>
+        <p:style>
+          <a:lnRef idx="2">
+            <a:schemeClr val="accent1"/>
+          </a:lnRef>
+          <a:fillRef idx="0">
+            <a:schemeClr val="accent1"/>
+          </a:fillRef>
+          <a:effectRef idx="1">
+            <a:schemeClr val="accent1"/>
+          </a:effectRef>
+          <a:fontRef idx="minor">
+            <a:schemeClr val="tx1"/>
+          </a:fontRef>
+        </p:style>
+      </p:cxnSp>
+      <p:cxnSp>
+        <p:nvCxnSpPr>
+          <p:cNvPr id="38" name="Connector 37"/>
+          <p:cNvCxnSpPr/>
+          <p:nvPr/>
+        </p:nvCxnSpPr>
+        <p:spPr>
+          <a:xfrm flipV="1">
+            <a:off x="1983582" y="5210438"/>
+            <a:ext cx="36809" cy="13569"/>
+          </a:xfrm>
+          <a:prstGeom prst="line">
+            <a:avLst/>
+          </a:prstGeom>
+          <a:ln w="38100">
+            <a:solidFill>
+              <a:srgbClr val="008D91"/>
+            </a:solidFill>
+          </a:ln>
+        </p:spPr>
+        <p:style>
+          <a:lnRef idx="2">
+            <a:schemeClr val="accent1"/>
+          </a:lnRef>
+          <a:fillRef idx="0">
+            <a:schemeClr val="accent1"/>
+          </a:fillRef>
+          <a:effectRef idx="1">
+            <a:schemeClr val="accent1"/>
+          </a:effectRef>
+          <a:fontRef idx="minor">
+            <a:schemeClr val="tx1"/>
+          </a:fontRef>
+        </p:style>
+      </p:cxnSp>
+      <p:cxnSp>
+        <p:nvCxnSpPr>
+          <p:cNvPr id="39" name="Connector 38"/>
+          <p:cNvCxnSpPr/>
+          <p:nvPr/>
+        </p:nvCxnSpPr>
+        <p:spPr>
+          <a:xfrm flipV="1">
+            <a:off x="2020391" y="5195707"/>
+            <a:ext cx="36809" cy="14731"/>
+          </a:xfrm>
+          <a:prstGeom prst="line">
+            <a:avLst/>
+          </a:prstGeom>
+          <a:ln w="38100">
+            <a:solidFill>
+              <a:srgbClr val="008D91"/>
+            </a:solidFill>
+          </a:ln>
+        </p:spPr>
+        <p:style>
+          <a:lnRef idx="2">
+            <a:schemeClr val="accent1"/>
+          </a:lnRef>
+          <a:fillRef idx="0">
+            <a:schemeClr val="accent1"/>
+          </a:fillRef>
+          <a:effectRef idx="1">
+            <a:schemeClr val="accent1"/>
+          </a:effectRef>
+          <a:fontRef idx="minor">
+            <a:schemeClr val="tx1"/>
+          </a:fontRef>
+        </p:style>
+      </p:cxnSp>
+      <p:cxnSp>
+        <p:nvCxnSpPr>
+          <p:cNvPr id="40" name="Connector 39"/>
+          <p:cNvCxnSpPr/>
+          <p:nvPr/>
+        </p:nvCxnSpPr>
+        <p:spPr>
+          <a:xfrm flipV="1">
+            <a:off x="2057200" y="5179765"/>
+            <a:ext cx="36809" cy="15942"/>
+          </a:xfrm>
+          <a:prstGeom prst="line">
+            <a:avLst/>
+          </a:prstGeom>
+          <a:ln w="38100">
+            <a:solidFill>
+              <a:srgbClr val="008D91"/>
+            </a:solidFill>
+          </a:ln>
+        </p:spPr>
+        <p:style>
+          <a:lnRef idx="2">
+            <a:schemeClr val="accent1"/>
+          </a:lnRef>
+          <a:fillRef idx="0">
+            <a:schemeClr val="accent1"/>
+          </a:fillRef>
+          <a:effectRef idx="1">
+            <a:schemeClr val="accent1"/>
+          </a:effectRef>
+          <a:fontRef idx="minor">
+            <a:schemeClr val="tx1"/>
+          </a:fontRef>
+        </p:style>
+      </p:cxnSp>
+      <p:cxnSp>
+        <p:nvCxnSpPr>
+          <p:cNvPr id="41" name="Connector 40"/>
+          <p:cNvCxnSpPr/>
+          <p:nvPr/>
+        </p:nvCxnSpPr>
+        <p:spPr>
+          <a:xfrm flipV="1">
+            <a:off x="2094009" y="5162566"/>
+            <a:ext cx="36809" cy="17199"/>
+          </a:xfrm>
+          <a:prstGeom prst="line">
+            <a:avLst/>
+          </a:prstGeom>
+          <a:ln w="38100">
+            <a:solidFill>
+              <a:srgbClr val="008D91"/>
+            </a:solidFill>
+          </a:ln>
+        </p:spPr>
+        <p:style>
+          <a:lnRef idx="2">
+            <a:schemeClr val="accent1"/>
+          </a:lnRef>
+          <a:fillRef idx="0">
+            <a:schemeClr val="accent1"/>
+          </a:fillRef>
+          <a:effectRef idx="1">
+            <a:schemeClr val="accent1"/>
+          </a:effectRef>
+          <a:fontRef idx="minor">
+            <a:schemeClr val="tx1"/>
+          </a:fontRef>
+        </p:style>
+      </p:cxnSp>
+      <p:cxnSp>
+        <p:nvCxnSpPr>
+          <p:cNvPr id="42" name="Connector 41"/>
+          <p:cNvCxnSpPr/>
+          <p:nvPr/>
+        </p:nvCxnSpPr>
+        <p:spPr>
+          <a:xfrm flipV="1">
+            <a:off x="2130818" y="5144061"/>
+            <a:ext cx="36808" cy="18505"/>
+          </a:xfrm>
+          <a:prstGeom prst="line">
+            <a:avLst/>
+          </a:prstGeom>
+          <a:ln w="38100">
+            <a:solidFill>
+              <a:srgbClr val="008D91"/>
+            </a:solidFill>
+          </a:ln>
+        </p:spPr>
+        <p:style>
+          <a:lnRef idx="2">
+            <a:schemeClr val="accent1"/>
+          </a:lnRef>
+          <a:fillRef idx="0">
+            <a:schemeClr val="accent1"/>
+          </a:fillRef>
+          <a:effectRef idx="1">
+            <a:schemeClr val="accent1"/>
+          </a:effectRef>
+          <a:fontRef idx="minor">
+            <a:schemeClr val="tx1"/>
+          </a:fontRef>
+        </p:style>
+      </p:cxnSp>
+      <p:cxnSp>
+        <p:nvCxnSpPr>
+          <p:cNvPr id="43" name="Connector 42"/>
+          <p:cNvCxnSpPr/>
+          <p:nvPr/>
+        </p:nvCxnSpPr>
+        <p:spPr>
+          <a:xfrm flipV="1">
+            <a:off x="2167626" y="5124203"/>
+            <a:ext cx="36809" cy="19858"/>
+          </a:xfrm>
+          <a:prstGeom prst="line">
+            <a:avLst/>
+          </a:prstGeom>
+          <a:ln w="38100">
+            <a:solidFill>
+              <a:srgbClr val="008D91"/>
+            </a:solidFill>
+          </a:ln>
+        </p:spPr>
+        <p:style>
+          <a:lnRef idx="2">
+            <a:schemeClr val="accent1"/>
+          </a:lnRef>
+          <a:fillRef idx="0">
+            <a:schemeClr val="accent1"/>
+          </a:fillRef>
+          <a:effectRef idx="1">
+            <a:schemeClr val="accent1"/>
+          </a:effectRef>
+          <a:fontRef idx="minor">
+            <a:schemeClr val="tx1"/>
+          </a:fontRef>
+        </p:style>
+      </p:cxnSp>
+      <p:cxnSp>
+        <p:nvCxnSpPr>
+          <p:cNvPr id="44" name="Connector 43"/>
+          <p:cNvCxnSpPr/>
+          <p:nvPr/>
+        </p:nvCxnSpPr>
+        <p:spPr>
+          <a:xfrm flipV="1">
+            <a:off x="2204435" y="5102944"/>
+            <a:ext cx="36809" cy="21259"/>
+          </a:xfrm>
+          <a:prstGeom prst="line">
+            <a:avLst/>
+          </a:prstGeom>
+          <a:ln w="38100">
+            <a:solidFill>
+              <a:srgbClr val="008D91"/>
+            </a:solidFill>
+          </a:ln>
+        </p:spPr>
+        <p:style>
+          <a:lnRef idx="2">
+            <a:schemeClr val="accent1"/>
+          </a:lnRef>
+          <a:fillRef idx="0">
+            <a:schemeClr val="accent1"/>
+          </a:fillRef>
+          <a:effectRef idx="1">
+            <a:schemeClr val="accent1"/>
+          </a:effectRef>
+          <a:fontRef idx="minor">
+            <a:schemeClr val="tx1"/>
+          </a:fontRef>
+        </p:style>
+      </p:cxnSp>
+      <p:cxnSp>
+        <p:nvCxnSpPr>
+          <p:cNvPr id="45" name="Connector 44"/>
+          <p:cNvCxnSpPr/>
+          <p:nvPr/>
+        </p:nvCxnSpPr>
+        <p:spPr>
+          <a:xfrm flipV="1">
+            <a:off x="2241244" y="5080235"/>
+            <a:ext cx="36809" cy="22709"/>
+          </a:xfrm>
+          <a:prstGeom prst="line">
+            <a:avLst/>
+          </a:prstGeom>
+          <a:ln w="38100">
+            <a:solidFill>
+              <a:srgbClr val="008D91"/>
+            </a:solidFill>
+          </a:ln>
+        </p:spPr>
+        <p:style>
+          <a:lnRef idx="2">
+            <a:schemeClr val="accent1"/>
+          </a:lnRef>
+          <a:fillRef idx="0">
+            <a:schemeClr val="accent1"/>
+          </a:fillRef>
+          <a:effectRef idx="1">
+            <a:schemeClr val="accent1"/>
+          </a:effectRef>
+          <a:fontRef idx="minor">
+            <a:schemeClr val="tx1"/>
+          </a:fontRef>
+        </p:style>
+      </p:cxnSp>
+      <p:cxnSp>
+        <p:nvCxnSpPr>
+          <p:cNvPr id="46" name="Connector 45"/>
+          <p:cNvCxnSpPr/>
+          <p:nvPr/>
+        </p:nvCxnSpPr>
+        <p:spPr>
+          <a:xfrm flipV="1">
+            <a:off x="2278053" y="5056030"/>
+            <a:ext cx="36808" cy="24205"/>
+          </a:xfrm>
+          <a:prstGeom prst="line">
+            <a:avLst/>
+          </a:prstGeom>
+          <a:ln w="38100">
+            <a:solidFill>
+              <a:srgbClr val="008D91"/>
+            </a:solidFill>
+          </a:ln>
+        </p:spPr>
+        <p:style>
+          <a:lnRef idx="2">
+            <a:schemeClr val="accent1"/>
+          </a:lnRef>
+          <a:fillRef idx="0">
+            <a:schemeClr val="accent1"/>
+          </a:fillRef>
+          <a:effectRef idx="1">
+            <a:schemeClr val="accent1"/>
+          </a:effectRef>
+          <a:fontRef idx="minor">
+            <a:schemeClr val="tx1"/>
+          </a:fontRef>
+        </p:style>
+      </p:cxnSp>
+      <p:cxnSp>
+        <p:nvCxnSpPr>
+          <p:cNvPr id="47" name="Connector 46"/>
+          <p:cNvCxnSpPr/>
+          <p:nvPr/>
+        </p:nvCxnSpPr>
+        <p:spPr>
+          <a:xfrm flipV="1">
+            <a:off x="2314861" y="5030280"/>
+            <a:ext cx="36809" cy="25750"/>
+          </a:xfrm>
+          <a:prstGeom prst="line">
+            <a:avLst/>
+          </a:prstGeom>
+          <a:ln w="38100">
+            <a:solidFill>
+              <a:srgbClr val="008D91"/>
+            </a:solidFill>
+          </a:ln>
+        </p:spPr>
+        <p:style>
+          <a:lnRef idx="2">
+            <a:schemeClr val="accent1"/>
+          </a:lnRef>
+          <a:fillRef idx="0">
+            <a:schemeClr val="accent1"/>
+          </a:fillRef>
+          <a:effectRef idx="1">
+            <a:schemeClr val="accent1"/>
+          </a:effectRef>
+          <a:fontRef idx="minor">
+            <a:schemeClr val="tx1"/>
+          </a:fontRef>
+        </p:style>
+      </p:cxnSp>
+      <p:cxnSp>
+        <p:nvCxnSpPr>
+          <p:cNvPr id="48" name="Connector 47"/>
+          <p:cNvCxnSpPr/>
+          <p:nvPr/>
+        </p:nvCxnSpPr>
+        <p:spPr>
+          <a:xfrm flipV="1">
+            <a:off x="2351670" y="5002938"/>
+            <a:ext cx="36809" cy="27342"/>
+          </a:xfrm>
+          <a:prstGeom prst="line">
+            <a:avLst/>
+          </a:prstGeom>
+          <a:ln w="38100">
+            <a:solidFill>
+              <a:srgbClr val="008D91"/>
+            </a:solidFill>
+          </a:ln>
+        </p:spPr>
+        <p:style>
+          <a:lnRef idx="2">
+            <a:schemeClr val="accent1"/>
+          </a:lnRef>
+          <a:fillRef idx="0">
+            <a:schemeClr val="accent1"/>
+          </a:fillRef>
+          <a:effectRef idx="1">
+            <a:schemeClr val="accent1"/>
+          </a:effectRef>
+          <a:fontRef idx="minor">
+            <a:schemeClr val="tx1"/>
+          </a:fontRef>
+        </p:style>
+      </p:cxnSp>
+      <p:cxnSp>
+        <p:nvCxnSpPr>
+          <p:cNvPr id="49" name="Connector 48"/>
+          <p:cNvCxnSpPr/>
+          <p:nvPr/>
+        </p:nvCxnSpPr>
+        <p:spPr>
+          <a:xfrm flipV="1">
+            <a:off x="2388479" y="4973956"/>
+            <a:ext cx="36809" cy="28982"/>
+          </a:xfrm>
+          <a:prstGeom prst="line">
+            <a:avLst/>
+          </a:prstGeom>
+          <a:ln w="38100">
+            <a:solidFill>
+              <a:srgbClr val="008D91"/>
+            </a:solidFill>
+          </a:ln>
+        </p:spPr>
+        <p:style>
+          <a:lnRef idx="2">
+            <a:schemeClr val="accent1"/>
+          </a:lnRef>
+          <a:fillRef idx="0">
+            <a:schemeClr val="accent1"/>
+          </a:fillRef>
+          <a:effectRef idx="1">
+            <a:schemeClr val="accent1"/>
+          </a:effectRef>
+          <a:fontRef idx="minor">
+            <a:schemeClr val="tx1"/>
+          </a:fontRef>
+        </p:style>
+      </p:cxnSp>
+      <p:cxnSp>
+        <p:nvCxnSpPr>
+          <p:cNvPr id="50" name="Connector 49"/>
+          <p:cNvCxnSpPr/>
+          <p:nvPr/>
+        </p:nvCxnSpPr>
+        <p:spPr>
+          <a:xfrm flipV="1">
+            <a:off x="2425288" y="4943286"/>
+            <a:ext cx="36808" cy="30670"/>
+          </a:xfrm>
+          <a:prstGeom prst="line">
+            <a:avLst/>
+          </a:prstGeom>
+          <a:ln w="38100">
+            <a:solidFill>
+              <a:srgbClr val="008D91"/>
+            </a:solidFill>
+          </a:ln>
+        </p:spPr>
+        <p:style>
+          <a:lnRef idx="2">
+            <a:schemeClr val="accent1"/>
+          </a:lnRef>
+          <a:fillRef idx="0">
+            <a:schemeClr val="accent1"/>
+          </a:fillRef>
+          <a:effectRef idx="1">
+            <a:schemeClr val="accent1"/>
+          </a:effectRef>
+          <a:fontRef idx="minor">
+            <a:schemeClr val="tx1"/>
+          </a:fontRef>
+        </p:style>
+      </p:cxnSp>
+      <p:cxnSp>
+        <p:nvCxnSpPr>
+          <p:cNvPr id="51" name="Connector 50"/>
+          <p:cNvCxnSpPr/>
+          <p:nvPr/>
+        </p:nvCxnSpPr>
+        <p:spPr>
+          <a:xfrm flipV="1">
+            <a:off x="2462096" y="4910881"/>
+            <a:ext cx="36809" cy="32405"/>
+          </a:xfrm>
+          <a:prstGeom prst="line">
+            <a:avLst/>
+          </a:prstGeom>
+          <a:ln w="38100">
+            <a:solidFill>
+              <a:srgbClr val="008D91"/>
+            </a:solidFill>
+          </a:ln>
+        </p:spPr>
+        <p:style>
+          <a:lnRef idx="2">
+            <a:schemeClr val="accent1"/>
+          </a:lnRef>
+          <a:fillRef idx="0">
+            <a:schemeClr val="accent1"/>
+          </a:fillRef>
+          <a:effectRef idx="1">
+            <a:schemeClr val="accent1"/>
+          </a:effectRef>
+          <a:fontRef idx="minor">
+            <a:schemeClr val="tx1"/>
+          </a:fontRef>
+        </p:style>
+      </p:cxnSp>
+      <p:cxnSp>
+        <p:nvCxnSpPr>
+          <p:cNvPr id="52" name="Connector 51"/>
+          <p:cNvCxnSpPr/>
+          <p:nvPr/>
+        </p:nvCxnSpPr>
+        <p:spPr>
+          <a:xfrm flipV="1">
+            <a:off x="2498905" y="4876692"/>
+            <a:ext cx="36809" cy="34189"/>
+          </a:xfrm>
+          <a:prstGeom prst="line">
+            <a:avLst/>
+          </a:prstGeom>
+          <a:ln w="38100">
+            <a:solidFill>
+              <a:srgbClr val="008D91"/>
+            </a:solidFill>
+          </a:ln>
+        </p:spPr>
+        <p:style>
+          <a:lnRef idx="2">
+            <a:schemeClr val="accent1"/>
+          </a:lnRef>
+          <a:fillRef idx="0">
+            <a:schemeClr val="accent1"/>
+          </a:fillRef>
+          <a:effectRef idx="1">
+            <a:schemeClr val="accent1"/>
+          </a:effectRef>
+          <a:fontRef idx="minor">
+            <a:schemeClr val="tx1"/>
+          </a:fontRef>
+        </p:style>
+      </p:cxnSp>
+      <p:cxnSp>
+        <p:nvCxnSpPr>
+          <p:cNvPr id="53" name="Connector 52"/>
+          <p:cNvCxnSpPr/>
+          <p:nvPr/>
+        </p:nvCxnSpPr>
+        <p:spPr>
+          <a:xfrm flipV="1">
+            <a:off x="2535714" y="4840672"/>
+            <a:ext cx="36809" cy="36020"/>
+          </a:xfrm>
+          <a:prstGeom prst="line">
+            <a:avLst/>
+          </a:prstGeom>
+          <a:ln w="38100">
+            <a:solidFill>
+              <a:srgbClr val="008D91"/>
+            </a:solidFill>
+          </a:ln>
+        </p:spPr>
+        <p:style>
+          <a:lnRef idx="2">
+            <a:schemeClr val="accent1"/>
+          </a:lnRef>
+          <a:fillRef idx="0">
+            <a:schemeClr val="accent1"/>
+          </a:fillRef>
+          <a:effectRef idx="1">
+            <a:schemeClr val="accent1"/>
+          </a:effectRef>
+          <a:fontRef idx="minor">
+            <a:schemeClr val="tx1"/>
+          </a:fontRef>
+        </p:style>
+      </p:cxnSp>
+      <p:cxnSp>
+        <p:nvCxnSpPr>
+          <p:cNvPr id="54" name="Connector 53"/>
+          <p:cNvCxnSpPr/>
+          <p:nvPr/>
+        </p:nvCxnSpPr>
+        <p:spPr>
+          <a:xfrm flipV="1">
+            <a:off x="2572523" y="4802773"/>
+            <a:ext cx="36808" cy="37899"/>
+          </a:xfrm>
+          <a:prstGeom prst="line">
+            <a:avLst/>
+          </a:prstGeom>
+          <a:ln w="38100">
+            <a:solidFill>
+              <a:srgbClr val="008D91"/>
+            </a:solidFill>
+          </a:ln>
+        </p:spPr>
+        <p:style>
+          <a:lnRef idx="2">
+            <a:schemeClr val="accent1"/>
+          </a:lnRef>
+          <a:fillRef idx="0">
+            <a:schemeClr val="accent1"/>
+          </a:fillRef>
+          <a:effectRef idx="1">
+            <a:schemeClr val="accent1"/>
+          </a:effectRef>
+          <a:fontRef idx="minor">
+            <a:schemeClr val="tx1"/>
+          </a:fontRef>
+        </p:style>
+      </p:cxnSp>
+      <p:cxnSp>
+        <p:nvCxnSpPr>
+          <p:cNvPr id="55" name="Connector 54"/>
+          <p:cNvCxnSpPr/>
+          <p:nvPr/>
+        </p:nvCxnSpPr>
+        <p:spPr>
+          <a:xfrm flipV="1">
+            <a:off x="2609331" y="4762948"/>
+            <a:ext cx="36809" cy="39825"/>
+          </a:xfrm>
+          <a:prstGeom prst="line">
+            <a:avLst/>
+          </a:prstGeom>
+          <a:ln w="38100">
+            <a:solidFill>
+              <a:srgbClr val="008D91"/>
+            </a:solidFill>
+          </a:ln>
+        </p:spPr>
+        <p:style>
+          <a:lnRef idx="2">
+            <a:schemeClr val="accent1"/>
+          </a:lnRef>
+          <a:fillRef idx="0">
+            <a:schemeClr val="accent1"/>
+          </a:fillRef>
+          <a:effectRef idx="1">
+            <a:schemeClr val="accent1"/>
+          </a:effectRef>
+          <a:fontRef idx="minor">
+            <a:schemeClr val="tx1"/>
+          </a:fontRef>
+        </p:style>
+      </p:cxnSp>
+      <p:cxnSp>
+        <p:nvCxnSpPr>
+          <p:cNvPr id="56" name="Connector 55"/>
+          <p:cNvCxnSpPr/>
+          <p:nvPr/>
+        </p:nvCxnSpPr>
+        <p:spPr>
+          <a:xfrm flipV="1">
+            <a:off x="2646140" y="4721148"/>
+            <a:ext cx="36809" cy="41800"/>
+          </a:xfrm>
+          <a:prstGeom prst="line">
+            <a:avLst/>
+          </a:prstGeom>
+          <a:ln w="38100">
+            <a:solidFill>
+              <a:srgbClr val="008D91"/>
+            </a:solidFill>
+          </a:ln>
+        </p:spPr>
+        <p:style>
+          <a:lnRef idx="2">
+            <a:schemeClr val="accent1"/>
+          </a:lnRef>
+          <a:fillRef idx="0">
+            <a:schemeClr val="accent1"/>
+          </a:fillRef>
+          <a:effectRef idx="1">
+            <a:schemeClr val="accent1"/>
+          </a:effectRef>
+          <a:fontRef idx="minor">
+            <a:schemeClr val="tx1"/>
+          </a:fontRef>
+        </p:style>
+      </p:cxnSp>
+      <p:cxnSp>
+        <p:nvCxnSpPr>
+          <p:cNvPr id="57" name="Connector 56"/>
+          <p:cNvCxnSpPr/>
+          <p:nvPr/>
+        </p:nvCxnSpPr>
+        <p:spPr>
+          <a:xfrm flipV="1">
+            <a:off x="2682949" y="4677326"/>
+            <a:ext cx="36809" cy="43822"/>
+          </a:xfrm>
+          <a:prstGeom prst="line">
+            <a:avLst/>
+          </a:prstGeom>
+          <a:ln w="38100">
+            <a:solidFill>
+              <a:srgbClr val="008D91"/>
+            </a:solidFill>
+          </a:ln>
+        </p:spPr>
+        <p:style>
+          <a:lnRef idx="2">
+            <a:schemeClr val="accent1"/>
+          </a:lnRef>
+          <a:fillRef idx="0">
+            <a:schemeClr val="accent1"/>
+          </a:fillRef>
+          <a:effectRef idx="1">
+            <a:schemeClr val="accent1"/>
+          </a:effectRef>
+          <a:fontRef idx="minor">
+            <a:schemeClr val="tx1"/>
+          </a:fontRef>
+        </p:style>
+      </p:cxnSp>
+      <p:cxnSp>
+        <p:nvCxnSpPr>
+          <p:cNvPr id="58" name="Connector 57"/>
+          <p:cNvCxnSpPr/>
+          <p:nvPr/>
+        </p:nvCxnSpPr>
+        <p:spPr>
+          <a:xfrm flipV="1">
+            <a:off x="2719758" y="4631434"/>
+            <a:ext cx="36808" cy="45892"/>
+          </a:xfrm>
+          <a:prstGeom prst="line">
+            <a:avLst/>
+          </a:prstGeom>
+          <a:ln w="38100">
+            <a:solidFill>
+              <a:srgbClr val="008D91"/>
+            </a:solidFill>
+          </a:ln>
+        </p:spPr>
+        <p:style>
+          <a:lnRef idx="2">
+            <a:schemeClr val="accent1"/>
+          </a:lnRef>
+          <a:fillRef idx="0">
+            <a:schemeClr val="accent1"/>
+          </a:fillRef>
+          <a:effectRef idx="1">
+            <a:schemeClr val="accent1"/>
+          </a:effectRef>
+          <a:fontRef idx="minor">
+            <a:schemeClr val="tx1"/>
+          </a:fontRef>
+        </p:style>
+      </p:cxnSp>
+      <p:cxnSp>
+        <p:nvCxnSpPr>
+          <p:cNvPr id="59" name="Connector 58"/>
+          <p:cNvCxnSpPr/>
+          <p:nvPr/>
+        </p:nvCxnSpPr>
+        <p:spPr>
+          <a:xfrm flipV="1">
+            <a:off x="2756566" y="4583424"/>
+            <a:ext cx="36809" cy="48010"/>
+          </a:xfrm>
+          <a:prstGeom prst="line">
+            <a:avLst/>
+          </a:prstGeom>
+          <a:ln w="38100">
+            <a:solidFill>
+              <a:srgbClr val="008D91"/>
+            </a:solidFill>
+          </a:ln>
+        </p:spPr>
+        <p:style>
+          <a:lnRef idx="2">
+            <a:schemeClr val="accent1"/>
+          </a:lnRef>
+          <a:fillRef idx="0">
+            <a:schemeClr val="accent1"/>
+          </a:fillRef>
+          <a:effectRef idx="1">
+            <a:schemeClr val="accent1"/>
+          </a:effectRef>
+          <a:fontRef idx="minor">
+            <a:schemeClr val="tx1"/>
+          </a:fontRef>
+        </p:style>
+      </p:cxnSp>
+      <p:cxnSp>
+        <p:nvCxnSpPr>
+          <p:cNvPr id="60" name="Connector 59"/>
+          <p:cNvCxnSpPr/>
+          <p:nvPr/>
+        </p:nvCxnSpPr>
+        <p:spPr>
+          <a:xfrm flipV="1">
+            <a:off x="2793375" y="4533249"/>
+            <a:ext cx="36809" cy="50175"/>
+          </a:xfrm>
+          <a:prstGeom prst="line">
+            <a:avLst/>
+          </a:prstGeom>
+          <a:ln w="38100">
+            <a:solidFill>
+              <a:srgbClr val="008D91"/>
+            </a:solidFill>
+          </a:ln>
+        </p:spPr>
+        <p:style>
+          <a:lnRef idx="2">
+            <a:schemeClr val="accent1"/>
+          </a:lnRef>
+          <a:fillRef idx="0">
+            <a:schemeClr val="accent1"/>
+          </a:fillRef>
+          <a:effectRef idx="1">
+            <a:schemeClr val="accent1"/>
+          </a:effectRef>
+          <a:fontRef idx="minor">
+            <a:schemeClr val="tx1"/>
+          </a:fontRef>
+        </p:style>
+      </p:cxnSp>
+      <p:cxnSp>
+        <p:nvCxnSpPr>
+          <p:cNvPr id="61" name="Connector 60"/>
+          <p:cNvCxnSpPr/>
+          <p:nvPr/>
+        </p:nvCxnSpPr>
+        <p:spPr>
+          <a:xfrm flipV="1">
+            <a:off x="2830184" y="4480860"/>
+            <a:ext cx="36809" cy="52389"/>
+          </a:xfrm>
+          <a:prstGeom prst="line">
+            <a:avLst/>
+          </a:prstGeom>
+          <a:ln w="38100">
+            <a:solidFill>
+              <a:srgbClr val="008D91"/>
+            </a:solidFill>
+          </a:ln>
+        </p:spPr>
+        <p:style>
+          <a:lnRef idx="2">
+            <a:schemeClr val="accent1"/>
+          </a:lnRef>
+          <a:fillRef idx="0">
+            <a:schemeClr val="accent1"/>
+          </a:fillRef>
+          <a:effectRef idx="1">
+            <a:schemeClr val="accent1"/>
+          </a:effectRef>
+          <a:fontRef idx="minor">
+            <a:schemeClr val="tx1"/>
+          </a:fontRef>
+        </p:style>
+      </p:cxnSp>
+      <p:cxnSp>
+        <p:nvCxnSpPr>
+          <p:cNvPr id="62" name="Connector 61"/>
+          <p:cNvCxnSpPr/>
+          <p:nvPr/>
+        </p:nvCxnSpPr>
+        <p:spPr>
+          <a:xfrm flipV="1">
+            <a:off x="2866993" y="4426211"/>
+            <a:ext cx="36808" cy="54649"/>
+          </a:xfrm>
+          <a:prstGeom prst="line">
+            <a:avLst/>
+          </a:prstGeom>
+          <a:ln w="38100">
+            <a:solidFill>
+              <a:srgbClr val="008D91"/>
+            </a:solidFill>
+          </a:ln>
+        </p:spPr>
+        <p:style>
+          <a:lnRef idx="2">
+            <a:schemeClr val="accent1"/>
+          </a:lnRef>
+          <a:fillRef idx="0">
+            <a:schemeClr val="accent1"/>
+          </a:fillRef>
+          <a:effectRef idx="1">
+            <a:schemeClr val="accent1"/>
+          </a:effectRef>
+          <a:fontRef idx="minor">
+            <a:schemeClr val="tx1"/>
+          </a:fontRef>
+        </p:style>
+      </p:cxnSp>
+      <p:cxnSp>
+        <p:nvCxnSpPr>
+          <p:cNvPr id="63" name="Connector 62"/>
+          <p:cNvCxnSpPr/>
+          <p:nvPr/>
+        </p:nvCxnSpPr>
+        <p:spPr>
+          <a:xfrm flipV="1">
+            <a:off x="2903801" y="4369252"/>
+            <a:ext cx="36809" cy="56959"/>
+          </a:xfrm>
+          <a:prstGeom prst="line">
+            <a:avLst/>
+          </a:prstGeom>
+          <a:ln w="38100">
+            <a:solidFill>
+              <a:srgbClr val="008D91"/>
+            </a:solidFill>
+          </a:ln>
+        </p:spPr>
+        <p:style>
+          <a:lnRef idx="2">
+            <a:schemeClr val="accent1"/>
+          </a:lnRef>
+          <a:fillRef idx="0">
+            <a:schemeClr val="accent1"/>
+          </a:fillRef>
+          <a:effectRef idx="1">
+            <a:schemeClr val="accent1"/>
+          </a:effectRef>
+          <a:fontRef idx="minor">
+            <a:schemeClr val="tx1"/>
+          </a:fontRef>
+        </p:style>
+      </p:cxnSp>
+      <p:cxnSp>
+        <p:nvCxnSpPr>
+          <p:cNvPr id="64" name="Connector 63"/>
+          <p:cNvCxnSpPr/>
+          <p:nvPr/>
+        </p:nvCxnSpPr>
+        <p:spPr>
+          <a:xfrm flipV="1">
+            <a:off x="2940610" y="4309938"/>
+            <a:ext cx="36809" cy="59314"/>
+          </a:xfrm>
+          <a:prstGeom prst="line">
+            <a:avLst/>
+          </a:prstGeom>
+          <a:ln w="38100">
+            <a:solidFill>
+              <a:srgbClr val="008D91"/>
+            </a:solidFill>
+          </a:ln>
+        </p:spPr>
+        <p:style>
+          <a:lnRef idx="2">
+            <a:schemeClr val="accent1"/>
+          </a:lnRef>
+          <a:fillRef idx="0">
+            <a:schemeClr val="accent1"/>
+          </a:fillRef>
+          <a:effectRef idx="1">
+            <a:schemeClr val="accent1"/>
+          </a:effectRef>
+          <a:fontRef idx="minor">
+            <a:schemeClr val="tx1"/>
+          </a:fontRef>
+        </p:style>
+      </p:cxnSp>
+      <p:cxnSp>
+        <p:nvCxnSpPr>
+          <p:cNvPr id="65" name="Connector 64"/>
+          <p:cNvCxnSpPr/>
+          <p:nvPr/>
+        </p:nvCxnSpPr>
+        <p:spPr>
+          <a:xfrm flipV="1">
+            <a:off x="2977419" y="4248218"/>
+            <a:ext cx="36809" cy="61720"/>
+          </a:xfrm>
+          <a:prstGeom prst="line">
+            <a:avLst/>
+          </a:prstGeom>
+          <a:ln w="38100">
+            <a:solidFill>
+              <a:srgbClr val="008D91"/>
+            </a:solidFill>
+          </a:ln>
+        </p:spPr>
+        <p:style>
+          <a:lnRef idx="2">
+            <a:schemeClr val="accent1"/>
+          </a:lnRef>
+          <a:fillRef idx="0">
+            <a:schemeClr val="accent1"/>
+          </a:fillRef>
+          <a:effectRef idx="1">
+            <a:schemeClr val="accent1"/>
+          </a:effectRef>
+          <a:fontRef idx="minor">
+            <a:schemeClr val="tx1"/>
+          </a:fontRef>
+        </p:style>
+      </p:cxnSp>
+      <p:cxnSp>
+        <p:nvCxnSpPr>
+          <p:cNvPr id="66" name="Connector 65"/>
+          <p:cNvCxnSpPr/>
+          <p:nvPr/>
+        </p:nvCxnSpPr>
+        <p:spPr>
+          <a:xfrm flipV="1">
+            <a:off x="3014228" y="4184047"/>
+            <a:ext cx="36808" cy="64171"/>
+          </a:xfrm>
+          <a:prstGeom prst="line">
+            <a:avLst/>
+          </a:prstGeom>
+          <a:ln w="38100">
+            <a:solidFill>
+              <a:srgbClr val="008D91"/>
+            </a:solidFill>
+          </a:ln>
+        </p:spPr>
+        <p:style>
+          <a:lnRef idx="2">
+            <a:schemeClr val="accent1"/>
+          </a:lnRef>
+          <a:fillRef idx="0">
+            <a:schemeClr val="accent1"/>
+          </a:fillRef>
+          <a:effectRef idx="1">
+            <a:schemeClr val="accent1"/>
+          </a:effectRef>
+          <a:fontRef idx="minor">
+            <a:schemeClr val="tx1"/>
+          </a:fontRef>
+        </p:style>
+      </p:cxnSp>
+      <p:cxnSp>
+        <p:nvCxnSpPr>
+          <p:cNvPr id="67" name="Connector 66"/>
+          <p:cNvCxnSpPr/>
+          <p:nvPr/>
+        </p:nvCxnSpPr>
+        <p:spPr>
+          <a:xfrm flipV="1">
+            <a:off x="3051036" y="4117376"/>
+            <a:ext cx="36809" cy="66671"/>
+          </a:xfrm>
+          <a:prstGeom prst="line">
+            <a:avLst/>
+          </a:prstGeom>
+          <a:ln w="38100">
+            <a:solidFill>
+              <a:srgbClr val="008D91"/>
+            </a:solidFill>
+          </a:ln>
+        </p:spPr>
+        <p:style>
+          <a:lnRef idx="2">
+            <a:schemeClr val="accent1"/>
+          </a:lnRef>
+          <a:fillRef idx="0">
+            <a:schemeClr val="accent1"/>
+          </a:fillRef>
+          <a:effectRef idx="1">
+            <a:schemeClr val="accent1"/>
+          </a:effectRef>
+          <a:fontRef idx="minor">
+            <a:schemeClr val="tx1"/>
+          </a:fontRef>
+        </p:style>
+      </p:cxnSp>
+      <p:cxnSp>
+        <p:nvCxnSpPr>
+          <p:cNvPr id="68" name="Connector 67"/>
+          <p:cNvCxnSpPr/>
+          <p:nvPr/>
+        </p:nvCxnSpPr>
+        <p:spPr>
+          <a:xfrm flipV="1">
+            <a:off x="3087845" y="4048157"/>
+            <a:ext cx="36809" cy="69219"/>
+          </a:xfrm>
+          <a:prstGeom prst="line">
+            <a:avLst/>
+          </a:prstGeom>
+          <a:ln w="38100">
+            <a:solidFill>
+              <a:srgbClr val="008D91"/>
+            </a:solidFill>
+          </a:ln>
+        </p:spPr>
+        <p:style>
+          <a:lnRef idx="2">
+            <a:schemeClr val="accent1"/>
+          </a:lnRef>
+          <a:fillRef idx="0">
+            <a:schemeClr val="accent1"/>
+          </a:fillRef>
+          <a:effectRef idx="1">
+            <a:schemeClr val="accent1"/>
+          </a:effectRef>
+          <a:fontRef idx="minor">
+            <a:schemeClr val="tx1"/>
+          </a:fontRef>
+        </p:style>
+      </p:cxnSp>
+      <p:cxnSp>
+        <p:nvCxnSpPr>
+          <p:cNvPr id="69" name="Connector 68"/>
+          <p:cNvCxnSpPr/>
+          <p:nvPr/>
+        </p:nvCxnSpPr>
+        <p:spPr>
+          <a:xfrm flipV="1">
+            <a:off x="3124654" y="3976343"/>
+            <a:ext cx="36809" cy="71814"/>
+          </a:xfrm>
+          <a:prstGeom prst="line">
+            <a:avLst/>
+          </a:prstGeom>
+          <a:ln w="38100">
+            <a:solidFill>
+              <a:srgbClr val="008D91"/>
+            </a:solidFill>
+          </a:ln>
+        </p:spPr>
+        <p:style>
+          <a:lnRef idx="2">
+            <a:schemeClr val="accent1"/>
+          </a:lnRef>
+          <a:fillRef idx="0">
+            <a:schemeClr val="accent1"/>
+          </a:fillRef>
+          <a:effectRef idx="1">
+            <a:schemeClr val="accent1"/>
+          </a:effectRef>
+          <a:fontRef idx="minor">
+            <a:schemeClr val="tx1"/>
+          </a:fontRef>
+        </p:style>
+      </p:cxnSp>
+      <p:cxnSp>
+        <p:nvCxnSpPr>
+          <p:cNvPr id="70" name="Connector 69"/>
+          <p:cNvCxnSpPr/>
+          <p:nvPr/>
+        </p:nvCxnSpPr>
+        <p:spPr>
+          <a:xfrm flipV="1">
+            <a:off x="3161463" y="3901885"/>
+            <a:ext cx="36808" cy="74458"/>
+          </a:xfrm>
+          <a:prstGeom prst="line">
+            <a:avLst/>
+          </a:prstGeom>
+          <a:ln w="38100">
+            <a:solidFill>
+              <a:srgbClr val="008D91"/>
+            </a:solidFill>
+          </a:ln>
+        </p:spPr>
+        <p:style>
+          <a:lnRef idx="2">
+            <a:schemeClr val="accent1"/>
+          </a:lnRef>
+          <a:fillRef idx="0">
+            <a:schemeClr val="accent1"/>
+          </a:fillRef>
+          <a:effectRef idx="1">
+            <a:schemeClr val="accent1"/>
+          </a:effectRef>
+          <a:fontRef idx="minor">
+            <a:schemeClr val="tx1"/>
+          </a:fontRef>
+        </p:style>
+      </p:cxnSp>
+      <p:cxnSp>
+        <p:nvCxnSpPr>
+          <p:cNvPr id="71" name="Connector 70"/>
+          <p:cNvCxnSpPr/>
+          <p:nvPr/>
+        </p:nvCxnSpPr>
+        <p:spPr>
+          <a:xfrm flipV="1">
+            <a:off x="3198271" y="3824737"/>
+            <a:ext cx="36809" cy="77148"/>
+          </a:xfrm>
+          <a:prstGeom prst="line">
+            <a:avLst/>
+          </a:prstGeom>
+          <a:ln w="38100">
+            <a:solidFill>
+              <a:srgbClr val="008D91"/>
+            </a:solidFill>
+          </a:ln>
+        </p:spPr>
+        <p:style>
+          <a:lnRef idx="2">
+            <a:schemeClr val="accent1"/>
+          </a:lnRef>
+          <a:fillRef idx="0">
+            <a:schemeClr val="accent1"/>
+          </a:fillRef>
+          <a:effectRef idx="1">
+            <a:schemeClr val="accent1"/>
+          </a:effectRef>
+          <a:fontRef idx="minor">
+            <a:schemeClr val="tx1"/>
+          </a:fontRef>
+        </p:style>
+      </p:cxnSp>
+      <p:cxnSp>
+        <p:nvCxnSpPr>
+          <p:cNvPr id="72" name="Connector 71"/>
+          <p:cNvCxnSpPr/>
+          <p:nvPr/>
+        </p:nvCxnSpPr>
+        <p:spPr>
+          <a:xfrm flipV="1">
+            <a:off x="3235080" y="3744850"/>
+            <a:ext cx="36809" cy="79887"/>
+          </a:xfrm>
+          <a:prstGeom prst="line">
+            <a:avLst/>
+          </a:prstGeom>
+          <a:ln w="38100">
+            <a:solidFill>
+              <a:srgbClr val="008D91"/>
+            </a:solidFill>
+          </a:ln>
+        </p:spPr>
+        <p:style>
+          <a:lnRef idx="2">
+            <a:schemeClr val="accent1"/>
+          </a:lnRef>
+          <a:fillRef idx="0">
+            <a:schemeClr val="accent1"/>
+          </a:fillRef>
+          <a:effectRef idx="1">
+            <a:schemeClr val="accent1"/>
+          </a:effectRef>
+          <a:fontRef idx="minor">
+            <a:schemeClr val="tx1"/>
+          </a:fontRef>
+        </p:style>
+      </p:cxnSp>
+      <p:cxnSp>
+        <p:nvCxnSpPr>
+          <p:cNvPr id="73" name="Connector 72"/>
+          <p:cNvCxnSpPr/>
+          <p:nvPr/>
+        </p:nvCxnSpPr>
+        <p:spPr>
+          <a:xfrm flipV="1">
+            <a:off x="3271889" y="3662176"/>
+            <a:ext cx="36809" cy="82674"/>
+          </a:xfrm>
+          <a:prstGeom prst="line">
+            <a:avLst/>
+          </a:prstGeom>
+          <a:ln w="38100">
+            <a:solidFill>
+              <a:srgbClr val="008D91"/>
+            </a:solidFill>
+          </a:ln>
+        </p:spPr>
+        <p:style>
+          <a:lnRef idx="2">
+            <a:schemeClr val="accent1"/>
+          </a:lnRef>
+          <a:fillRef idx="0">
+            <a:schemeClr val="accent1"/>
+          </a:fillRef>
+          <a:effectRef idx="1">
+            <a:schemeClr val="accent1"/>
+          </a:effectRef>
+          <a:fontRef idx="minor">
+            <a:schemeClr val="tx1"/>
+          </a:fontRef>
+        </p:style>
+      </p:cxnSp>
+      <p:cxnSp>
+        <p:nvCxnSpPr>
+          <p:cNvPr id="74" name="Connector 73"/>
+          <p:cNvCxnSpPr/>
+          <p:nvPr/>
+        </p:nvCxnSpPr>
+        <p:spPr>
+          <a:xfrm flipV="1">
+            <a:off x="3308698" y="3576668"/>
+            <a:ext cx="36808" cy="85508"/>
+          </a:xfrm>
+          <a:prstGeom prst="line">
+            <a:avLst/>
+          </a:prstGeom>
+          <a:ln w="38100">
+            <a:solidFill>
+              <a:srgbClr val="008D91"/>
+            </a:solidFill>
+          </a:ln>
+        </p:spPr>
+        <p:style>
+          <a:lnRef idx="2">
+            <a:schemeClr val="accent1"/>
+          </a:lnRef>
+          <a:fillRef idx="0">
+            <a:schemeClr val="accent1"/>
+          </a:fillRef>
+          <a:effectRef idx="1">
+            <a:schemeClr val="accent1"/>
+          </a:effectRef>
+          <a:fontRef idx="minor">
+            <a:schemeClr val="tx1"/>
+          </a:fontRef>
+        </p:style>
+      </p:cxnSp>
+      <p:cxnSp>
+        <p:nvCxnSpPr>
+          <p:cNvPr id="75" name="Connector 74"/>
+          <p:cNvCxnSpPr/>
+          <p:nvPr/>
+        </p:nvCxnSpPr>
+        <p:spPr>
+          <a:xfrm flipV="1">
+            <a:off x="3345506" y="3488279"/>
+            <a:ext cx="36809" cy="88389"/>
+          </a:xfrm>
+          <a:prstGeom prst="line">
+            <a:avLst/>
+          </a:prstGeom>
+          <a:ln w="38100">
+            <a:solidFill>
+              <a:srgbClr val="008D91"/>
+            </a:solidFill>
+          </a:ln>
+        </p:spPr>
+        <p:style>
+          <a:lnRef idx="2">
+            <a:schemeClr val="accent1"/>
+          </a:lnRef>
+          <a:fillRef idx="0">
+            <a:schemeClr val="accent1"/>
+          </a:fillRef>
+          <a:effectRef idx="1">
+            <a:schemeClr val="accent1"/>
+          </a:effectRef>
+          <a:fontRef idx="minor">
+            <a:schemeClr val="tx1"/>
+          </a:fontRef>
+        </p:style>
+      </p:cxnSp>
+      <p:cxnSp>
+        <p:nvCxnSpPr>
+          <p:cNvPr id="76" name="Connector 75"/>
+          <p:cNvCxnSpPr/>
+          <p:nvPr/>
+        </p:nvCxnSpPr>
+        <p:spPr>
+          <a:xfrm flipV="1">
+            <a:off x="3382315" y="3396959"/>
+            <a:ext cx="36809" cy="91320"/>
+          </a:xfrm>
+          <a:prstGeom prst="line">
+            <a:avLst/>
+          </a:prstGeom>
+          <a:ln w="38100">
+            <a:solidFill>
+              <a:srgbClr val="008D91"/>
+            </a:solidFill>
+          </a:ln>
+        </p:spPr>
+        <p:style>
+          <a:lnRef idx="2">
+            <a:schemeClr val="accent1"/>
+          </a:lnRef>
+          <a:fillRef idx="0">
+            <a:schemeClr val="accent1"/>
+          </a:fillRef>
+          <a:effectRef idx="1">
+            <a:schemeClr val="accent1"/>
+          </a:effectRef>
+          <a:fontRef idx="minor">
+            <a:schemeClr val="tx1"/>
+          </a:fontRef>
+        </p:style>
+      </p:cxnSp>
+      <p:cxnSp>
+        <p:nvCxnSpPr>
+          <p:cNvPr id="77" name="Connector 76"/>
+          <p:cNvCxnSpPr/>
+          <p:nvPr/>
+        </p:nvCxnSpPr>
+        <p:spPr>
+          <a:xfrm flipV="1">
+            <a:off x="3419124" y="3302662"/>
+            <a:ext cx="36809" cy="94297"/>
+          </a:xfrm>
+          <a:prstGeom prst="line">
+            <a:avLst/>
+          </a:prstGeom>
+          <a:ln w="38100">
+            <a:solidFill>
+              <a:srgbClr val="008D91"/>
+            </a:solidFill>
+          </a:ln>
+        </p:spPr>
+        <p:style>
+          <a:lnRef idx="2">
+            <a:schemeClr val="accent1"/>
+          </a:lnRef>
+          <a:fillRef idx="0">
+            <a:schemeClr val="accent1"/>
+          </a:fillRef>
+          <a:effectRef idx="1">
+            <a:schemeClr val="accent1"/>
+          </a:effectRef>
+          <a:fontRef idx="minor">
+            <a:schemeClr val="tx1"/>
+          </a:fontRef>
+        </p:style>
+      </p:cxnSp>
+      <p:cxnSp>
+        <p:nvCxnSpPr>
+          <p:cNvPr id="78" name="Connector 77"/>
+          <p:cNvCxnSpPr/>
+          <p:nvPr/>
+        </p:nvCxnSpPr>
+        <p:spPr>
+          <a:xfrm flipV="1">
+            <a:off x="3455933" y="3205339"/>
+            <a:ext cx="36808" cy="97323"/>
+          </a:xfrm>
+          <a:prstGeom prst="line">
+            <a:avLst/>
+          </a:prstGeom>
+          <a:ln w="38100">
+            <a:solidFill>
+              <a:srgbClr val="008D91"/>
+            </a:solidFill>
+          </a:ln>
+        </p:spPr>
+        <p:style>
+          <a:lnRef idx="2">
+            <a:schemeClr val="accent1"/>
+          </a:lnRef>
+          <a:fillRef idx="0">
+            <a:schemeClr val="accent1"/>
+          </a:fillRef>
+          <a:effectRef idx="1">
+            <a:schemeClr val="accent1"/>
+          </a:effectRef>
+          <a:fontRef idx="minor">
+            <a:schemeClr val="tx1"/>
+          </a:fontRef>
+        </p:style>
+      </p:cxnSp>
+      <p:cxnSp>
+        <p:nvCxnSpPr>
+          <p:cNvPr id="79" name="Connector 78"/>
+          <p:cNvCxnSpPr/>
+          <p:nvPr/>
+        </p:nvCxnSpPr>
+        <p:spPr>
+          <a:xfrm flipV="1">
+            <a:off x="3492741" y="3104944"/>
+            <a:ext cx="36809" cy="100395"/>
+          </a:xfrm>
+          <a:prstGeom prst="line">
+            <a:avLst/>
+          </a:prstGeom>
+          <a:ln w="38100">
+            <a:solidFill>
+              <a:srgbClr val="008D91"/>
+            </a:solidFill>
+          </a:ln>
+        </p:spPr>
+        <p:style>
+          <a:lnRef idx="2">
+            <a:schemeClr val="accent1"/>
+          </a:lnRef>
+          <a:fillRef idx="0">
+            <a:schemeClr val="accent1"/>
+          </a:fillRef>
+          <a:effectRef idx="1">
+            <a:schemeClr val="accent1"/>
+          </a:effectRef>
+          <a:fontRef idx="minor">
+            <a:schemeClr val="tx1"/>
+          </a:fontRef>
+        </p:style>
+      </p:cxnSp>
+      <p:cxnSp>
+        <p:nvCxnSpPr>
+          <p:cNvPr id="80" name="Connector 79"/>
+          <p:cNvCxnSpPr/>
+          <p:nvPr/>
+        </p:nvCxnSpPr>
+        <p:spPr>
+          <a:xfrm flipV="1">
+            <a:off x="3529550" y="3001427"/>
+            <a:ext cx="36809" cy="103517"/>
+          </a:xfrm>
+          <a:prstGeom prst="line">
+            <a:avLst/>
+          </a:prstGeom>
+          <a:ln w="38100">
+            <a:solidFill>
+              <a:srgbClr val="008D91"/>
+            </a:solidFill>
+          </a:ln>
+        </p:spPr>
+        <p:style>
+          <a:lnRef idx="2">
+            <a:schemeClr val="accent1"/>
+          </a:lnRef>
+          <a:fillRef idx="0">
+            <a:schemeClr val="accent1"/>
+          </a:fillRef>
+          <a:effectRef idx="1">
+            <a:schemeClr val="accent1"/>
+          </a:effectRef>
+          <a:fontRef idx="minor">
+            <a:schemeClr val="tx1"/>
+          </a:fontRef>
+        </p:style>
+      </p:cxnSp>
+      <p:cxnSp>
+        <p:nvCxnSpPr>
+          <p:cNvPr id="81" name="Connector 80"/>
+          <p:cNvCxnSpPr/>
+          <p:nvPr/>
+        </p:nvCxnSpPr>
+        <p:spPr>
+          <a:xfrm flipV="1">
+            <a:off x="3566359" y="2894742"/>
+            <a:ext cx="36809" cy="106685"/>
+          </a:xfrm>
+          <a:prstGeom prst="line">
+            <a:avLst/>
+          </a:prstGeom>
+          <a:ln w="38100">
+            <a:solidFill>
+              <a:srgbClr val="008D91"/>
+            </a:solidFill>
+          </a:ln>
+        </p:spPr>
+        <p:style>
+          <a:lnRef idx="2">
+            <a:schemeClr val="accent1"/>
+          </a:lnRef>
+          <a:fillRef idx="0">
+            <a:schemeClr val="accent1"/>
+          </a:fillRef>
+          <a:effectRef idx="1">
+            <a:schemeClr val="accent1"/>
+          </a:effectRef>
+          <a:fontRef idx="minor">
+            <a:schemeClr val="tx1"/>
+          </a:fontRef>
+        </p:style>
+      </p:cxnSp>
+      <p:cxnSp>
+        <p:nvCxnSpPr>
+          <p:cNvPr id="82" name="Connector 81"/>
+          <p:cNvCxnSpPr/>
+          <p:nvPr/>
+        </p:nvCxnSpPr>
+        <p:spPr>
+          <a:xfrm flipV="1">
+            <a:off x="3603168" y="2784841"/>
+            <a:ext cx="36809" cy="109901"/>
+          </a:xfrm>
+          <a:prstGeom prst="line">
+            <a:avLst/>
+          </a:prstGeom>
+          <a:ln w="38100">
+            <a:solidFill>
+              <a:srgbClr val="008D91"/>
+            </a:solidFill>
+          </a:ln>
+        </p:spPr>
+        <p:style>
+          <a:lnRef idx="2">
+            <a:schemeClr val="accent1"/>
+          </a:lnRef>
+          <a:fillRef idx="0">
+            <a:schemeClr val="accent1"/>
+          </a:fillRef>
+          <a:effectRef idx="1">
+            <a:schemeClr val="accent1"/>
+          </a:effectRef>
+          <a:fontRef idx="minor">
+            <a:schemeClr val="tx1"/>
+          </a:fontRef>
+        </p:style>
+      </p:cxnSp>
+      <p:cxnSp>
+        <p:nvCxnSpPr>
+          <p:cNvPr id="83" name="Connector 82"/>
+          <p:cNvCxnSpPr/>
+          <p:nvPr/>
+        </p:nvCxnSpPr>
+        <p:spPr>
+          <a:xfrm flipV="1">
+            <a:off x="3639977" y="2671675"/>
+            <a:ext cx="36808" cy="113166"/>
+          </a:xfrm>
+          <a:prstGeom prst="line">
+            <a:avLst/>
+          </a:prstGeom>
+          <a:ln w="38100">
+            <a:solidFill>
+              <a:srgbClr val="008D91"/>
+            </a:solidFill>
+          </a:ln>
+        </p:spPr>
+        <p:style>
+          <a:lnRef idx="2">
+            <a:schemeClr val="accent1"/>
+          </a:lnRef>
+          <a:fillRef idx="0">
+            <a:schemeClr val="accent1"/>
+          </a:fillRef>
+          <a:effectRef idx="1">
+            <a:schemeClr val="accent1"/>
+          </a:effectRef>
+          <a:fontRef idx="minor">
+            <a:schemeClr val="tx1"/>
+          </a:fontRef>
+        </p:style>
+      </p:cxnSp>
+      <p:cxnSp>
+        <p:nvCxnSpPr>
+          <p:cNvPr id="84" name="Connector 83"/>
+          <p:cNvCxnSpPr/>
+          <p:nvPr/>
+        </p:nvCxnSpPr>
+        <p:spPr>
+          <a:xfrm flipV="1">
+            <a:off x="3676785" y="2555197"/>
+            <a:ext cx="36809" cy="116478"/>
+          </a:xfrm>
+          <a:prstGeom prst="line">
+            <a:avLst/>
+          </a:prstGeom>
+          <a:ln w="38100">
+            <a:solidFill>
+              <a:srgbClr val="008D91"/>
+            </a:solidFill>
+          </a:ln>
+        </p:spPr>
+        <p:style>
+          <a:lnRef idx="2">
+            <a:schemeClr val="accent1"/>
+          </a:lnRef>
+          <a:fillRef idx="0">
+            <a:schemeClr val="accent1"/>
+          </a:fillRef>
+          <a:effectRef idx="1">
+            <a:schemeClr val="accent1"/>
+          </a:effectRef>
+          <a:fontRef idx="minor">
+            <a:schemeClr val="tx1"/>
+          </a:fontRef>
+        </p:style>
+      </p:cxnSp>
+      <p:cxnSp>
+        <p:nvCxnSpPr>
+          <p:cNvPr id="85" name="Connector 84"/>
+          <p:cNvCxnSpPr/>
+          <p:nvPr/>
+        </p:nvCxnSpPr>
+        <p:spPr>
+          <a:xfrm flipV="1">
+            <a:off x="3713594" y="2435360"/>
+            <a:ext cx="36809" cy="119837"/>
+          </a:xfrm>
+          <a:prstGeom prst="line">
+            <a:avLst/>
+          </a:prstGeom>
+          <a:ln w="38100">
+            <a:solidFill>
+              <a:srgbClr val="008D91"/>
+            </a:solidFill>
+          </a:ln>
+        </p:spPr>
+        <p:style>
+          <a:lnRef idx="2">
+            <a:schemeClr val="accent1"/>
+          </a:lnRef>
+          <a:fillRef idx="0">
+            <a:schemeClr val="accent1"/>
+          </a:fillRef>
+          <a:effectRef idx="1">
+            <a:schemeClr val="accent1"/>
+          </a:effectRef>
+          <a:fontRef idx="minor">
+            <a:schemeClr val="tx1"/>
+          </a:fontRef>
+        </p:style>
+      </p:cxnSp>
+      <p:cxnSp>
+        <p:nvCxnSpPr>
+          <p:cNvPr id="86" name="Connector 85"/>
+          <p:cNvCxnSpPr/>
+          <p:nvPr/>
+        </p:nvCxnSpPr>
+        <p:spPr>
+          <a:xfrm flipV="1">
+            <a:off x="3750403" y="2312115"/>
+            <a:ext cx="36809" cy="123245"/>
+          </a:xfrm>
+          <a:prstGeom prst="line">
+            <a:avLst/>
+          </a:prstGeom>
+          <a:ln w="38100">
+            <a:solidFill>
+              <a:srgbClr val="008D91"/>
+            </a:solidFill>
+          </a:ln>
+        </p:spPr>
+        <p:style>
+          <a:lnRef idx="2">
+            <a:schemeClr val="accent1"/>
+          </a:lnRef>
+          <a:fillRef idx="0">
+            <a:schemeClr val="accent1"/>
+          </a:fillRef>
+          <a:effectRef idx="1">
+            <a:schemeClr val="accent1"/>
+          </a:effectRef>
+          <a:fontRef idx="minor">
+            <a:schemeClr val="tx1"/>
+          </a:fontRef>
+        </p:style>
+      </p:cxnSp>
+      <p:cxnSp>
+        <p:nvCxnSpPr>
+          <p:cNvPr id="87" name="Connector 86"/>
+          <p:cNvCxnSpPr/>
+          <p:nvPr/>
+        </p:nvCxnSpPr>
+        <p:spPr>
+          <a:xfrm flipV="1">
+            <a:off x="3787212" y="2185415"/>
+            <a:ext cx="36808" cy="126700"/>
+          </a:xfrm>
+          <a:prstGeom prst="line">
+            <a:avLst/>
+          </a:prstGeom>
+          <a:ln w="38100">
+            <a:solidFill>
+              <a:srgbClr val="008D91"/>
+            </a:solidFill>
+          </a:ln>
+        </p:spPr>
+        <p:style>
+          <a:lnRef idx="2">
+            <a:schemeClr val="accent1"/>
+          </a:lnRef>
+          <a:fillRef idx="0">
+            <a:schemeClr val="accent1"/>
+          </a:fillRef>
+          <a:effectRef idx="1">
+            <a:schemeClr val="accent1"/>
+          </a:effectRef>
+          <a:fontRef idx="minor">
+            <a:schemeClr val="tx1"/>
+          </a:fontRef>
+        </p:style>
+      </p:cxnSp>
+      <p:cxnSp>
+        <p:nvCxnSpPr>
+          <p:cNvPr id="88" name="Connector 87"/>
+          <p:cNvCxnSpPr/>
+          <p:nvPr/>
+        </p:nvCxnSpPr>
+        <p:spPr>
+          <a:xfrm>
+            <a:off x="3824020" y="2185415"/>
+            <a:ext cx="2924252" cy="0"/>
+          </a:xfrm>
+          <a:prstGeom prst="line">
+            <a:avLst/>
+          </a:prstGeom>
+          <a:ln w="38100">
+            <a:solidFill>
+              <a:srgbClr val="008D91"/>
+            </a:solidFill>
+          </a:ln>
+        </p:spPr>
+        <p:style>
+          <a:lnRef idx="2">
+            <a:schemeClr val="accent1"/>
+          </a:lnRef>
+          <a:fillRef idx="0">
+            <a:schemeClr val="accent1"/>
+          </a:fillRef>
+          <a:effectRef idx="1">
+            <a:schemeClr val="accent1"/>
+          </a:effectRef>
+          <a:fontRef idx="minor">
+            <a:schemeClr val="tx1"/>
+          </a:fontRef>
+        </p:style>
+      </p:cxnSp>
+      <p:cxnSp>
+        <p:nvCxnSpPr>
+          <p:cNvPr id="89" name="Connector 88"/>
+          <p:cNvCxnSpPr/>
+          <p:nvPr/>
+        </p:nvCxnSpPr>
+        <p:spPr>
+          <a:xfrm>
+            <a:off x="6748272" y="2185415"/>
+            <a:ext cx="0" cy="3090673"/>
+          </a:xfrm>
+          <a:prstGeom prst="line">
+            <a:avLst/>
+          </a:prstGeom>
+          <a:ln w="38100">
+            <a:solidFill>
+              <a:srgbClr val="008D91"/>
+            </a:solidFill>
+          </a:ln>
+        </p:spPr>
+        <p:style>
+          <a:lnRef idx="2">
+            <a:schemeClr val="accent1"/>
+          </a:lnRef>
+          <a:fillRef idx="0">
+            <a:schemeClr val="accent1"/>
+          </a:fillRef>
+          <a:effectRef idx="1">
+            <a:schemeClr val="accent1"/>
+          </a:effectRef>
+          <a:fontRef idx="minor">
+            <a:schemeClr val="tx1"/>
+          </a:fontRef>
+        </p:style>
+      </p:cxnSp>
+      <p:cxnSp>
+        <p:nvCxnSpPr>
+          <p:cNvPr id="90" name="Connector 89"/>
+          <p:cNvCxnSpPr/>
+          <p:nvPr/>
+        </p:nvCxnSpPr>
+        <p:spPr>
+          <a:xfrm>
+            <a:off x="6748272" y="5276088"/>
+            <a:ext cx="1124711" cy="0"/>
+          </a:xfrm>
+          <a:prstGeom prst="line">
+            <a:avLst/>
+          </a:prstGeom>
+          <a:ln w="38100">
+            <a:solidFill>
+              <a:srgbClr val="008D91"/>
+            </a:solidFill>
+          </a:ln>
+        </p:spPr>
+        <p:style>
+          <a:lnRef idx="2">
+            <a:schemeClr val="accent1"/>
+          </a:lnRef>
+          <a:fillRef idx="0">
+            <a:schemeClr val="accent1"/>
+          </a:fillRef>
+          <a:effectRef idx="1">
+            <a:schemeClr val="accent1"/>
+          </a:effectRef>
+          <a:fontRef idx="minor">
+            <a:schemeClr val="tx1"/>
+          </a:fontRef>
+        </p:style>
+      </p:cxnSp>
+      <p:sp>
+        <p:nvSpPr>
+          <p:cNvPr id="91" name="Oval 90"/>
+          <p:cNvSpPr/>
+          <p:nvPr/>
+        </p:nvSpPr>
+        <p:spPr>
+          <a:xfrm>
+            <a:off x="1749247" y="5225796"/>
+            <a:ext cx="100584" cy="100584"/>
+          </a:xfrm>
+          <a:prstGeom prst="ellipse">
+            <a:avLst/>
+          </a:prstGeom>
+          <a:solidFill>
+            <a:srgbClr val="008D91"/>
+          </a:solidFill>
+          <a:ln>
+            <a:noFill/>
+          </a:ln>
+        </p:spPr>
+        <p:style>
+          <a:lnRef idx="1">
+            <a:schemeClr val="accent1"/>
+          </a:lnRef>
+          <a:fillRef idx="3">
+            <a:schemeClr val="accent1"/>
+          </a:fillRef>
+          <a:effectRef idx="2">
+            <a:schemeClr val="accent1"/>
+          </a:effectRef>
+          <a:fontRef idx="minor">
+            <a:schemeClr val="lt1"/>
+          </a:fontRef>
+        </p:style>
+        <p:txBody>
+          <a:bodyPr rtlCol="0" anchor="ctr"/>
+          <a:lstStyle/>
+          <a:p>
+            <a:pPr algn="ctr"/>
+          </a:p>
+        </p:txBody>
+      </p:sp>
+      <p:sp>
+        <p:nvSpPr>
+          <p:cNvPr id="92" name="TextBox 91"/>
+          <p:cNvSpPr txBox="1"/>
+          <p:nvPr/>
+        </p:nvSpPr>
+        <p:spPr>
+          <a:xfrm>
+            <a:off x="1335024" y="4782312"/>
+            <a:ext cx="1005840" cy="329184"/>
+          </a:xfrm>
+          <a:prstGeom prst="rect">
+            <a:avLst/>
+          </a:prstGeom>
+          <a:noFill/>
+        </p:spPr>
+        <p:txBody>
+          <a:bodyPr wrap="square" lIns="27432" rIns="27432" tIns="18288" bIns="18288">
+            <a:spAutoFit/>
+          </a:bodyPr>
+          <a:lstStyle/>
+          <a:p>
+            <a:pPr algn="ctr">
+              <a:spcAft>
+                <a:spcPts val="500"/>
+              </a:spcAft>
+              <a:defRPr sz="1600" b="1">
+                <a:solidFill>
+                  <a:srgbClr val="008D91"/>
+                </a:solidFill>
+                <a:latin typeface="Arial"/>
+              </a:defRPr>
+            </a:pPr>
+            <a:r>
+              <a:t>Cut-in</a:t>
+            </a:r>
+          </a:p>
+        </p:txBody>
+      </p:sp>
+      <p:sp>
+        <p:nvSpPr>
+          <p:cNvPr id="93" name="Oval 92"/>
+          <p:cNvSpPr/>
+          <p:nvPr/>
+        </p:nvSpPr>
+        <p:spPr>
+          <a:xfrm>
+            <a:off x="3773728" y="2135123"/>
+            <a:ext cx="100584" cy="100584"/>
+          </a:xfrm>
+          <a:prstGeom prst="ellipse">
+            <a:avLst/>
+          </a:prstGeom>
+          <a:solidFill>
+            <a:srgbClr val="008D91"/>
+          </a:solidFill>
+          <a:ln>
+            <a:noFill/>
+          </a:ln>
+        </p:spPr>
+        <p:style>
+          <a:lnRef idx="1">
+            <a:schemeClr val="accent1"/>
+          </a:lnRef>
+          <a:fillRef idx="3">
+            <a:schemeClr val="accent1"/>
+          </a:fillRef>
+          <a:effectRef idx="2">
+            <a:schemeClr val="accent1"/>
+          </a:effectRef>
+          <a:fontRef idx="minor">
+            <a:schemeClr val="lt1"/>
+          </a:fontRef>
+        </p:style>
+        <p:txBody>
+          <a:bodyPr rtlCol="0" anchor="ctr"/>
+          <a:lstStyle/>
+          <a:p>
+            <a:pPr algn="ctr"/>
+          </a:p>
+        </p:txBody>
+      </p:sp>
+      <p:sp>
+        <p:nvSpPr>
+          <p:cNvPr id="94" name="TextBox 93"/>
+          <p:cNvSpPr txBox="1"/>
+          <p:nvPr/>
+        </p:nvSpPr>
+        <p:spPr>
+          <a:xfrm>
+            <a:off x="3639312" y="2432304"/>
+            <a:ext cx="1005840" cy="329184"/>
+          </a:xfrm>
+          <a:prstGeom prst="rect">
+            <a:avLst/>
+          </a:prstGeom>
+          <a:noFill/>
+        </p:spPr>
+        <p:txBody>
+          <a:bodyPr wrap="square" lIns="27432" rIns="27432" tIns="18288" bIns="18288">
+            <a:spAutoFit/>
+          </a:bodyPr>
+          <a:lstStyle/>
+          <a:p>
+            <a:pPr algn="ctr">
+              <a:spcAft>
+                <a:spcPts val="500"/>
+              </a:spcAft>
+              <a:defRPr sz="1600" b="1">
+                <a:solidFill>
+                  <a:srgbClr val="008D91"/>
+                </a:solidFill>
+                <a:latin typeface="Arial"/>
+              </a:defRPr>
+            </a:pPr>
+            <a:r>
+              <a:t>Rated</a:t>
+            </a:r>
+          </a:p>
+        </p:txBody>
+      </p:sp>
+      <p:sp>
+        <p:nvSpPr>
+          <p:cNvPr id="95" name="Oval 94"/>
+          <p:cNvSpPr/>
+          <p:nvPr/>
+        </p:nvSpPr>
+        <p:spPr>
+          <a:xfrm>
+            <a:off x="6697980" y="2135123"/>
+            <a:ext cx="100584" cy="100584"/>
+          </a:xfrm>
+          <a:prstGeom prst="ellipse">
+            <a:avLst/>
+          </a:prstGeom>
+          <a:solidFill>
+            <a:srgbClr val="008D91"/>
+          </a:solidFill>
+          <a:ln>
+            <a:noFill/>
+          </a:ln>
+        </p:spPr>
+        <p:style>
+          <a:lnRef idx="1">
+            <a:schemeClr val="accent1"/>
+          </a:lnRef>
+          <a:fillRef idx="3">
+            <a:schemeClr val="accent1"/>
+          </a:fillRef>
+          <a:effectRef idx="2">
+            <a:schemeClr val="accent1"/>
+          </a:effectRef>
+          <a:fontRef idx="minor">
+            <a:schemeClr val="lt1"/>
+          </a:fontRef>
+        </p:style>
+        <p:txBody>
+          <a:bodyPr rtlCol="0" anchor="ctr"/>
+          <a:lstStyle/>
+          <a:p>
+            <a:pPr algn="ctr"/>
+          </a:p>
+        </p:txBody>
+      </p:sp>
+      <p:sp>
+        <p:nvSpPr>
+          <p:cNvPr id="96" name="TextBox 95"/>
+          <p:cNvSpPr txBox="1"/>
+          <p:nvPr/>
+        </p:nvSpPr>
+        <p:spPr>
+          <a:xfrm>
+            <a:off x="6172200" y="2432304"/>
+            <a:ext cx="1143000" cy="329184"/>
+          </a:xfrm>
+          <a:prstGeom prst="rect">
+            <a:avLst/>
+          </a:prstGeom>
+          <a:noFill/>
+        </p:spPr>
+        <p:txBody>
+          <a:bodyPr wrap="square" lIns="27432" rIns="27432" tIns="18288" bIns="18288">
+            <a:spAutoFit/>
+          </a:bodyPr>
+          <a:lstStyle/>
+          <a:p>
+            <a:pPr algn="ctr">
+              <a:spcAft>
+                <a:spcPts val="500"/>
+              </a:spcAft>
+              <a:defRPr sz="1600" b="1">
+                <a:solidFill>
+                  <a:srgbClr val="008D91"/>
+                </a:solidFill>
+                <a:latin typeface="Arial"/>
+              </a:defRPr>
+            </a:pPr>
+            <a:r>
+              <a:t>Cut-out</a:t>
+            </a:r>
+          </a:p>
+        </p:txBody>
+      </p:sp>
+      <p:sp>
+        <p:nvSpPr>
+          <p:cNvPr id="97" name="Rounded Rectangle 96"/>
+          <p:cNvSpPr/>
+          <p:nvPr/>
+        </p:nvSpPr>
+        <p:spPr>
+          <a:xfrm>
+            <a:off x="8321040" y="1792224"/>
+            <a:ext cx="3246120" cy="1188720"/>
           </a:xfrm>
           <a:prstGeom prst="roundRect">
             <a:avLst>
@@ -18987,164 +21295,108 @@
       </p:sp>
       <p:sp>
         <p:nvSpPr>
-          <p:cNvPr id="9" name="Rectangle 8"/>
+          <p:cNvPr id="98" name="TextBox 97"/>
+          <p:cNvSpPr txBox="1"/>
+          <p:nvPr/>
+        </p:nvSpPr>
+        <p:spPr>
+          <a:xfrm>
+            <a:off x="8494776" y="1929384"/>
+            <a:ext cx="2907792" cy="356616"/>
+          </a:xfrm>
+          <a:prstGeom prst="rect">
+            <a:avLst/>
+          </a:prstGeom>
+          <a:noFill/>
+        </p:spPr>
+        <p:txBody>
+          <a:bodyPr wrap="square" lIns="27432" rIns="27432" tIns="18288" bIns="18288">
+            <a:spAutoFit/>
+          </a:bodyPr>
+          <a:lstStyle/>
+          <a:p>
+            <a:pPr algn="l">
+              <a:spcAft>
+                <a:spcPts val="500"/>
+              </a:spcAft>
+              <a:defRPr sz="1800" b="1">
+                <a:solidFill>
+                  <a:srgbClr val="008D91"/>
+                </a:solidFill>
+                <a:latin typeface="Arial"/>
+              </a:defRPr>
+            </a:pPr>
+            <a:r>
+              <a:t>BELOW RATED</a:t>
+            </a:r>
+          </a:p>
+        </p:txBody>
+      </p:sp>
+      <p:sp>
+        <p:nvSpPr>
+          <p:cNvPr id="99" name="TextBox 98"/>
+          <p:cNvSpPr txBox="1"/>
+          <p:nvPr/>
+        </p:nvSpPr>
+        <p:spPr>
+          <a:xfrm>
+            <a:off x="8494776" y="2395728"/>
+            <a:ext cx="2907792" cy="566928"/>
+          </a:xfrm>
+          <a:prstGeom prst="rect">
+            <a:avLst/>
+          </a:prstGeom>
+          <a:noFill/>
+        </p:spPr>
+        <p:txBody>
+          <a:bodyPr wrap="square" lIns="27432" rIns="27432" tIns="18288" bIns="18288">
+            <a:spAutoFit/>
+          </a:bodyPr>
+          <a:lstStyle/>
+          <a:p>
+            <a:pPr algn="l">
+              <a:spcAft>
+                <a:spcPts val="500"/>
+              </a:spcAft>
+              <a:defRPr sz="1700" b="0">
+                <a:solidFill>
+                  <a:srgbClr val="183247"/>
+                </a:solidFill>
+                <a:latin typeface="Arial"/>
+              </a:defRPr>
+            </a:pPr>
+            <a:r>
+              <a:t>Torque / speed control</a:t>
+            </a:r>
+          </a:p>
+          <a:p>
+            <a:pPr algn="l">
+              <a:spcAft>
+                <a:spcPts val="500"/>
+              </a:spcAft>
+              <a:defRPr sz="1700" b="0">
+                <a:solidFill>
+                  <a:srgbClr val="183247"/>
+                </a:solidFill>
+                <a:latin typeface="Arial"/>
+              </a:defRPr>
+            </a:pPr>
+            <a:r>
+              <a:t>helps capture energy</a:t>
+            </a:r>
+          </a:p>
+        </p:txBody>
+      </p:sp>
+      <p:sp>
+        <p:nvSpPr>
+          <p:cNvPr id="100" name="Rounded Rectangle 99"/>
           <p:cNvSpPr/>
           <p:nvPr/>
         </p:nvSpPr>
         <p:spPr>
           <a:xfrm>
-            <a:off x="594360" y="1783080"/>
-            <a:ext cx="54864" cy="3127248"/>
-          </a:xfrm>
-          <a:prstGeom prst="rect">
-            <a:avLst/>
-          </a:prstGeom>
-          <a:solidFill>
-            <a:srgbClr val="008D91"/>
-          </a:solidFill>
-          <a:ln>
-            <a:noFill/>
-          </a:ln>
-        </p:spPr>
-        <p:style>
-          <a:lnRef idx="1">
-            <a:schemeClr val="accent1"/>
-          </a:lnRef>
-          <a:fillRef idx="3">
-            <a:schemeClr val="accent1"/>
-          </a:fillRef>
-          <a:effectRef idx="2">
-            <a:schemeClr val="accent1"/>
-          </a:effectRef>
-          <a:fontRef idx="minor">
-            <a:schemeClr val="lt1"/>
-          </a:fontRef>
-        </p:style>
-        <p:txBody>
-          <a:bodyPr rtlCol="0" anchor="ctr"/>
-          <a:lstStyle/>
-          <a:p>
-            <a:pPr algn="ctr"/>
-          </a:p>
-        </p:txBody>
-      </p:sp>
-      <p:sp>
-        <p:nvSpPr>
-          <p:cNvPr id="10" name="TextBox 9"/>
-          <p:cNvSpPr txBox="1"/>
-          <p:nvPr/>
-        </p:nvSpPr>
-        <p:spPr>
-          <a:xfrm>
-            <a:off x="777240" y="1947672"/>
-            <a:ext cx="3218688" cy="502920"/>
-          </a:xfrm>
-          <a:prstGeom prst="rect">
-            <a:avLst/>
-          </a:prstGeom>
-          <a:noFill/>
-        </p:spPr>
-        <p:txBody>
-          <a:bodyPr wrap="square" lIns="27432" rIns="27432" tIns="18288" bIns="18288">
-            <a:spAutoFit/>
-          </a:bodyPr>
-          <a:lstStyle/>
-          <a:p>
-            <a:pPr algn="l">
-              <a:spcAft>
-                <a:spcPts val="500"/>
-              </a:spcAft>
-              <a:defRPr sz="2200" b="1">
-                <a:solidFill>
-                  <a:srgbClr val="008D91"/>
-                </a:solidFill>
-                <a:latin typeface="Arial"/>
-              </a:defRPr>
-            </a:pPr>
-            <a:r>
-              <a:t>01  YAW</a:t>
-            </a:r>
-          </a:p>
-        </p:txBody>
-      </p:sp>
-      <p:sp>
-        <p:nvSpPr>
-          <p:cNvPr id="11" name="TextBox 10"/>
-          <p:cNvSpPr txBox="1"/>
-          <p:nvPr/>
-        </p:nvSpPr>
-        <p:spPr>
-          <a:xfrm>
-            <a:off x="777240" y="2560320"/>
-            <a:ext cx="3218688" cy="2258568"/>
-          </a:xfrm>
-          <a:prstGeom prst="rect">
-            <a:avLst/>
-          </a:prstGeom>
-          <a:noFill/>
-        </p:spPr>
-        <p:txBody>
-          <a:bodyPr wrap="square" lIns="27432" rIns="27432" tIns="18288" bIns="18288">
-            <a:spAutoFit/>
-          </a:bodyPr>
-          <a:lstStyle/>
-          <a:p>
-            <a:pPr algn="l">
-              <a:spcAft>
-                <a:spcPts val="500"/>
-              </a:spcAft>
-              <a:defRPr sz="2000" b="0">
-                <a:solidFill>
-                  <a:srgbClr val="183247"/>
-                </a:solidFill>
-                <a:latin typeface="Arial"/>
-              </a:defRPr>
-            </a:pPr>
-            <a:r>
-              <a:t>Face the wind</a:t>
-            </a:r>
-          </a:p>
-          <a:p>
-            <a:pPr algn="l">
-              <a:spcAft>
-                <a:spcPts val="500"/>
-              </a:spcAft>
-              <a:defRPr sz="2000" b="0">
-                <a:solidFill>
-                  <a:srgbClr val="183247"/>
-                </a:solidFill>
-                <a:latin typeface="Arial"/>
-              </a:defRPr>
-            </a:pPr>
-          </a:p>
-          <a:p>
-            <a:pPr algn="l">
-              <a:spcAft>
-                <a:spcPts val="500"/>
-              </a:spcAft>
-              <a:defRPr sz="2000" b="0">
-                <a:solidFill>
-                  <a:srgbClr val="183247"/>
-                </a:solidFill>
-                <a:latin typeface="Arial"/>
-              </a:defRPr>
-            </a:pPr>
-            <a:r>
-              <a:t>Rotate the nacelle</a:t>
-            </a:r>
-          </a:p>
-        </p:txBody>
-      </p:sp>
-      <p:sp>
-        <p:nvSpPr>
-          <p:cNvPr id="12" name="Rounded Rectangle 11"/>
-          <p:cNvSpPr/>
-          <p:nvPr/>
-        </p:nvSpPr>
-        <p:spPr>
-          <a:xfrm>
-            <a:off x="4297680" y="1783080"/>
-            <a:ext cx="3584448" cy="3127248"/>
+            <a:off x="8321040" y="3154680"/>
+            <a:ext cx="3246120" cy="1188720"/>
           </a:xfrm>
           <a:prstGeom prst="roundRect">
             <a:avLst>
@@ -19182,164 +21434,108 @@
       </p:sp>
       <p:sp>
         <p:nvSpPr>
-          <p:cNvPr id="13" name="Rectangle 12"/>
+          <p:cNvPr id="101" name="TextBox 100"/>
+          <p:cNvSpPr txBox="1"/>
+          <p:nvPr/>
+        </p:nvSpPr>
+        <p:spPr>
+          <a:xfrm>
+            <a:off x="8494776" y="3291840"/>
+            <a:ext cx="2907792" cy="356616"/>
+          </a:xfrm>
+          <a:prstGeom prst="rect">
+            <a:avLst/>
+          </a:prstGeom>
+          <a:noFill/>
+        </p:spPr>
+        <p:txBody>
+          <a:bodyPr wrap="square" lIns="27432" rIns="27432" tIns="18288" bIns="18288">
+            <a:spAutoFit/>
+          </a:bodyPr>
+          <a:lstStyle/>
+          <a:p>
+            <a:pPr algn="l">
+              <a:spcAft>
+                <a:spcPts val="500"/>
+              </a:spcAft>
+              <a:defRPr sz="1800" b="1">
+                <a:solidFill>
+                  <a:srgbClr val="008D91"/>
+                </a:solidFill>
+                <a:latin typeface="Arial"/>
+              </a:defRPr>
+            </a:pPr>
+            <a:r>
+              <a:t>AT RATED</a:t>
+            </a:r>
+          </a:p>
+        </p:txBody>
+      </p:sp>
+      <p:sp>
+        <p:nvSpPr>
+          <p:cNvPr id="102" name="TextBox 101"/>
+          <p:cNvSpPr txBox="1"/>
+          <p:nvPr/>
+        </p:nvSpPr>
+        <p:spPr>
+          <a:xfrm>
+            <a:off x="8494776" y="3758184"/>
+            <a:ext cx="2907792" cy="566928"/>
+          </a:xfrm>
+          <a:prstGeom prst="rect">
+            <a:avLst/>
+          </a:prstGeom>
+          <a:noFill/>
+        </p:spPr>
+        <p:txBody>
+          <a:bodyPr wrap="square" lIns="27432" rIns="27432" tIns="18288" bIns="18288">
+            <a:spAutoFit/>
+          </a:bodyPr>
+          <a:lstStyle/>
+          <a:p>
+            <a:pPr algn="l">
+              <a:spcAft>
+                <a:spcPts val="500"/>
+              </a:spcAft>
+              <a:defRPr sz="1700" b="0">
+                <a:solidFill>
+                  <a:srgbClr val="183247"/>
+                </a:solidFill>
+                <a:latin typeface="Arial"/>
+              </a:defRPr>
+            </a:pPr>
+            <a:r>
+              <a:t>Pitch control limits</a:t>
+            </a:r>
+          </a:p>
+          <a:p>
+            <a:pPr algn="l">
+              <a:spcAft>
+                <a:spcPts val="500"/>
+              </a:spcAft>
+              <a:defRPr sz="1700" b="0">
+                <a:solidFill>
+                  <a:srgbClr val="183247"/>
+                </a:solidFill>
+                <a:latin typeface="Arial"/>
+              </a:defRPr>
+            </a:pPr>
+            <a:r>
+              <a:t>power and loading</a:t>
+            </a:r>
+          </a:p>
+        </p:txBody>
+      </p:sp>
+      <p:sp>
+        <p:nvSpPr>
+          <p:cNvPr id="103" name="Rounded Rectangle 102"/>
           <p:cNvSpPr/>
           <p:nvPr/>
         </p:nvSpPr>
         <p:spPr>
           <a:xfrm>
-            <a:off x="4297680" y="1783080"/>
-            <a:ext cx="54864" cy="3127248"/>
-          </a:xfrm>
-          <a:prstGeom prst="rect">
-            <a:avLst/>
-          </a:prstGeom>
-          <a:solidFill>
-            <a:srgbClr val="008D91"/>
-          </a:solidFill>
-          <a:ln>
-            <a:noFill/>
-          </a:ln>
-        </p:spPr>
-        <p:style>
-          <a:lnRef idx="1">
-            <a:schemeClr val="accent1"/>
-          </a:lnRef>
-          <a:fillRef idx="3">
-            <a:schemeClr val="accent1"/>
-          </a:fillRef>
-          <a:effectRef idx="2">
-            <a:schemeClr val="accent1"/>
-          </a:effectRef>
-          <a:fontRef idx="minor">
-            <a:schemeClr val="lt1"/>
-          </a:fontRef>
-        </p:style>
-        <p:txBody>
-          <a:bodyPr rtlCol="0" anchor="ctr"/>
-          <a:lstStyle/>
-          <a:p>
-            <a:pPr algn="ctr"/>
-          </a:p>
-        </p:txBody>
-      </p:sp>
-      <p:sp>
-        <p:nvSpPr>
-          <p:cNvPr id="14" name="TextBox 13"/>
-          <p:cNvSpPr txBox="1"/>
-          <p:nvPr/>
-        </p:nvSpPr>
-        <p:spPr>
-          <a:xfrm>
-            <a:off x="4480560" y="1947672"/>
-            <a:ext cx="3218688" cy="502920"/>
-          </a:xfrm>
-          <a:prstGeom prst="rect">
-            <a:avLst/>
-          </a:prstGeom>
-          <a:noFill/>
-        </p:spPr>
-        <p:txBody>
-          <a:bodyPr wrap="square" lIns="27432" rIns="27432" tIns="18288" bIns="18288">
-            <a:spAutoFit/>
-          </a:bodyPr>
-          <a:lstStyle/>
-          <a:p>
-            <a:pPr algn="l">
-              <a:spcAft>
-                <a:spcPts val="500"/>
-              </a:spcAft>
-              <a:defRPr sz="2200" b="1">
-                <a:solidFill>
-                  <a:srgbClr val="008D91"/>
-                </a:solidFill>
-                <a:latin typeface="Arial"/>
-              </a:defRPr>
-            </a:pPr>
-            <a:r>
-              <a:t>02  PITCH</a:t>
-            </a:r>
-          </a:p>
-        </p:txBody>
-      </p:sp>
-      <p:sp>
-        <p:nvSpPr>
-          <p:cNvPr id="15" name="TextBox 14"/>
-          <p:cNvSpPr txBox="1"/>
-          <p:nvPr/>
-        </p:nvSpPr>
-        <p:spPr>
-          <a:xfrm>
-            <a:off x="4480560" y="2560320"/>
-            <a:ext cx="3218688" cy="2258568"/>
-          </a:xfrm>
-          <a:prstGeom prst="rect">
-            <a:avLst/>
-          </a:prstGeom>
-          <a:noFill/>
-        </p:spPr>
-        <p:txBody>
-          <a:bodyPr wrap="square" lIns="27432" rIns="27432" tIns="18288" bIns="18288">
-            <a:spAutoFit/>
-          </a:bodyPr>
-          <a:lstStyle/>
-          <a:p>
-            <a:pPr algn="l">
-              <a:spcAft>
-                <a:spcPts val="500"/>
-              </a:spcAft>
-              <a:defRPr sz="2000" b="0">
-                <a:solidFill>
-                  <a:srgbClr val="183247"/>
-                </a:solidFill>
-                <a:latin typeface="Arial"/>
-              </a:defRPr>
-            </a:pPr>
-            <a:r>
-              <a:t>Regulate power</a:t>
-            </a:r>
-          </a:p>
-          <a:p>
-            <a:pPr algn="l">
-              <a:spcAft>
-                <a:spcPts val="500"/>
-              </a:spcAft>
-              <a:defRPr sz="2000" b="0">
-                <a:solidFill>
-                  <a:srgbClr val="183247"/>
-                </a:solidFill>
-                <a:latin typeface="Arial"/>
-              </a:defRPr>
-            </a:pPr>
-          </a:p>
-          <a:p>
-            <a:pPr algn="l">
-              <a:spcAft>
-                <a:spcPts val="500"/>
-              </a:spcAft>
-              <a:defRPr sz="2000" b="0">
-                <a:solidFill>
-                  <a:srgbClr val="183247"/>
-                </a:solidFill>
-                <a:latin typeface="Arial"/>
-              </a:defRPr>
-            </a:pPr>
-            <a:r>
-              <a:t>Change blade angle</a:t>
-            </a:r>
-          </a:p>
-        </p:txBody>
-      </p:sp>
-      <p:sp>
-        <p:nvSpPr>
-          <p:cNvPr id="16" name="Rounded Rectangle 15"/>
-          <p:cNvSpPr/>
-          <p:nvPr/>
-        </p:nvSpPr>
-        <p:spPr>
-          <a:xfrm>
-            <a:off x="8001000" y="1783080"/>
-            <a:ext cx="3584448" cy="3127248"/>
+            <a:off x="8321040" y="4517136"/>
+            <a:ext cx="3246120" cy="1188720"/>
           </a:xfrm>
           <a:prstGeom prst="roundRect">
             <a:avLst>
@@ -19377,57 +21573,14 @@
       </p:sp>
       <p:sp>
         <p:nvSpPr>
-          <p:cNvPr id="17" name="Rectangle 16"/>
-          <p:cNvSpPr/>
-          <p:nvPr/>
-        </p:nvSpPr>
-        <p:spPr>
-          <a:xfrm>
-            <a:off x="8001000" y="1783080"/>
-            <a:ext cx="54864" cy="3127248"/>
-          </a:xfrm>
-          <a:prstGeom prst="rect">
-            <a:avLst/>
-          </a:prstGeom>
-          <a:solidFill>
-            <a:srgbClr val="008D91"/>
-          </a:solidFill>
-          <a:ln>
-            <a:noFill/>
-          </a:ln>
-        </p:spPr>
-        <p:style>
-          <a:lnRef idx="1">
-            <a:schemeClr val="accent1"/>
-          </a:lnRef>
-          <a:fillRef idx="3">
-            <a:schemeClr val="accent1"/>
-          </a:fillRef>
-          <a:effectRef idx="2">
-            <a:schemeClr val="accent1"/>
-          </a:effectRef>
-          <a:fontRef idx="minor">
-            <a:schemeClr val="lt1"/>
-          </a:fontRef>
-        </p:style>
-        <p:txBody>
-          <a:bodyPr rtlCol="0" anchor="ctr"/>
-          <a:lstStyle/>
-          <a:p>
-            <a:pPr algn="ctr"/>
-          </a:p>
-        </p:txBody>
-      </p:sp>
-      <p:sp>
-        <p:nvSpPr>
-          <p:cNvPr id="18" name="TextBox 17"/>
-          <p:cNvSpPr txBox="1"/>
-          <p:nvPr/>
-        </p:nvSpPr>
-        <p:spPr>
-          <a:xfrm>
-            <a:off x="8183879" y="1947672"/>
-            <a:ext cx="3218688" cy="502920"/>
+          <p:cNvPr id="104" name="TextBox 103"/>
+          <p:cNvSpPr txBox="1"/>
+          <p:nvPr/>
+        </p:nvSpPr>
+        <p:spPr>
+          <a:xfrm>
+            <a:off x="8494776" y="4654296"/>
+            <a:ext cx="2907792" cy="356616"/>
           </a:xfrm>
           <a:prstGeom prst="rect">
             <a:avLst/>
@@ -19444,7 +21597,7 @@
               <a:spcAft>
                 <a:spcPts val="500"/>
               </a:spcAft>
-              <a:defRPr sz="2200" b="1">
+              <a:defRPr sz="1800" b="1">
                 <a:solidFill>
                   <a:srgbClr val="008D91"/>
                 </a:solidFill>
@@ -19452,21 +21605,21 @@
               </a:defRPr>
             </a:pPr>
             <a:r>
-              <a:t>03  TORQUE</a:t>
-            </a:r>
-          </a:p>
-        </p:txBody>
-      </p:sp>
-      <p:sp>
-        <p:nvSpPr>
-          <p:cNvPr id="19" name="TextBox 18"/>
-          <p:cNvSpPr txBox="1"/>
-          <p:nvPr/>
-        </p:nvSpPr>
-        <p:spPr>
-          <a:xfrm>
-            <a:off x="8183879" y="2560320"/>
-            <a:ext cx="3218688" cy="2258568"/>
+              <a:t>YAW + PROTECTION</a:t>
+            </a:r>
+          </a:p>
+        </p:txBody>
+      </p:sp>
+      <p:sp>
+        <p:nvSpPr>
+          <p:cNvPr id="105" name="TextBox 104"/>
+          <p:cNvSpPr txBox="1"/>
+          <p:nvPr/>
+        </p:nvSpPr>
+        <p:spPr>
+          <a:xfrm>
+            <a:off x="8494776" y="5120640"/>
+            <a:ext cx="2907792" cy="566928"/>
           </a:xfrm>
           <a:prstGeom prst="rect">
             <a:avLst/>
@@ -19483,7 +21636,7 @@
               <a:spcAft>
                 <a:spcPts val="500"/>
               </a:spcAft>
-              <a:defRPr sz="2000" b="0">
+              <a:defRPr sz="1700" b="0">
                 <a:solidFill>
                   <a:srgbClr val="183247"/>
                 </a:solidFill>
@@ -19491,7 +21644,7 @@
               </a:defRPr>
             </a:pPr>
             <a:r>
-              <a:t>Optimize capture</a:t>
+              <a:t>Face the wind; stop</a:t>
             </a:r>
           </a:p>
           <a:p>
@@ -19499,112 +21652,54 @@
               <a:spcAft>
                 <a:spcPts val="500"/>
               </a:spcAft>
-              <a:defRPr sz="2000" b="0">
+              <a:defRPr sz="1700" b="0">
                 <a:solidFill>
                   <a:srgbClr val="183247"/>
                 </a:solidFill>
                 <a:latin typeface="Arial"/>
               </a:defRPr>
             </a:pPr>
-          </a:p>
+            <a:r>
+              <a:t>beyond safe limits</a:t>
+            </a:r>
+          </a:p>
+        </p:txBody>
+      </p:sp>
+      <p:sp>
+        <p:nvSpPr>
+          <p:cNvPr id="106" name="TextBox 105"/>
+          <p:cNvSpPr txBox="1"/>
+          <p:nvPr/>
+        </p:nvSpPr>
+        <p:spPr>
+          <a:xfrm>
+            <a:off x="658368" y="6053328"/>
+            <a:ext cx="10927080" cy="274320"/>
+          </a:xfrm>
+          <a:prstGeom prst="rect">
+            <a:avLst/>
+          </a:prstGeom>
+          <a:noFill/>
+        </p:spPr>
+        <p:txBody>
+          <a:bodyPr wrap="square" lIns="27432" rIns="27432" tIns="18288" bIns="18288">
+            <a:spAutoFit/>
+          </a:bodyPr>
+          <a:lstStyle/>
           <a:p>
             <a:pPr algn="l">
               <a:spcAft>
                 <a:spcPts val="500"/>
               </a:spcAft>
-              <a:defRPr sz="2000" b="0">
-                <a:solidFill>
-                  <a:srgbClr val="183247"/>
-                </a:solidFill>
-                <a:latin typeface="Arial"/>
-              </a:defRPr>
-            </a:pPr>
-            <a:r>
-              <a:t>Control rotor speed</a:t>
-            </a:r>
-          </a:p>
-        </p:txBody>
-      </p:sp>
-      <p:sp>
-        <p:nvSpPr>
-          <p:cNvPr id="20" name="Rounded Rectangle 19"/>
-          <p:cNvSpPr/>
-          <p:nvPr/>
-        </p:nvSpPr>
-        <p:spPr>
-          <a:xfrm>
-            <a:off x="640080" y="5303520"/>
-            <a:ext cx="10927080" cy="676656"/>
-          </a:xfrm>
-          <a:prstGeom prst="roundRect">
-            <a:avLst>
-              <a:gd name="adj" fmla="val 12000"/>
-            </a:avLst>
-          </a:prstGeom>
-          <a:solidFill>
-            <a:srgbClr val="102538"/>
-          </a:solidFill>
-          <a:ln>
-            <a:noFill/>
-          </a:ln>
-        </p:spPr>
-        <p:style>
-          <a:lnRef idx="1">
-            <a:schemeClr val="accent1"/>
-          </a:lnRef>
-          <a:fillRef idx="3">
-            <a:schemeClr val="accent1"/>
-          </a:fillRef>
-          <a:effectRef idx="2">
-            <a:schemeClr val="accent1"/>
-          </a:effectRef>
-          <a:fontRef idx="minor">
-            <a:schemeClr val="lt1"/>
-          </a:fontRef>
-        </p:style>
-        <p:txBody>
-          <a:bodyPr rtlCol="0" anchor="ctr"/>
-          <a:lstStyle/>
-          <a:p>
-            <a:pPr algn="ctr"/>
-          </a:p>
-        </p:txBody>
-      </p:sp>
-      <p:sp>
-        <p:nvSpPr>
-          <p:cNvPr id="21" name="TextBox 20"/>
-          <p:cNvSpPr txBox="1"/>
-          <p:nvPr/>
-        </p:nvSpPr>
-        <p:spPr>
-          <a:xfrm>
-            <a:off x="841248" y="5440680"/>
-            <a:ext cx="10515600" cy="438912"/>
-          </a:xfrm>
-          <a:prstGeom prst="rect">
-            <a:avLst/>
-          </a:prstGeom>
-          <a:noFill/>
-        </p:spPr>
-        <p:txBody>
-          <a:bodyPr wrap="square" lIns="27432" rIns="27432" tIns="18288" bIns="18288">
-            <a:spAutoFit/>
-          </a:bodyPr>
-          <a:lstStyle/>
-          <a:p>
-            <a:pPr algn="l">
-              <a:spcAft>
-                <a:spcPts val="500"/>
-              </a:spcAft>
-              <a:defRPr sz="2200" b="0">
-                <a:solidFill>
-                  <a:srgbClr val="FFFFFF"/>
-                </a:solidFill>
-                <a:latin typeface="Arial"/>
-              </a:defRPr>
-            </a:pPr>
-            <a:r>
-              <a:t>Protection and plant control coordinate all three functions.</a:t>
+              <a:defRPr sz="1200" b="0">
+                <a:solidFill>
+                  <a:srgbClr val="5C6F7E"/>
+                </a:solidFill>
+                <a:latin typeface="Arial"/>
+              </a:defRPr>
+            </a:pPr>
+            <a:r>
+              <a:t>Teaching thresholds: 3 / 12 / 25 m/s. Actual turbines vary; this is not a manufacturer power curve.</a:t>
             </a:r>
           </a:p>
         </p:txBody>
@@ -20665,7 +22760,7 @@
         <p:spPr>
           <a:xfrm>
             <a:off x="594360" y="1737360"/>
-            <a:ext cx="3584448" cy="2029968"/>
+            <a:ext cx="3584448" cy="1938528"/>
           </a:xfrm>
           <a:prstGeom prst="roundRect">
             <a:avLst>
@@ -20710,7 +22805,7 @@
         <p:spPr>
           <a:xfrm>
             <a:off x="594360" y="1737360"/>
-            <a:ext cx="54864" cy="2029968"/>
+            <a:ext cx="54864" cy="1938528"/>
           </a:xfrm>
           <a:prstGeom prst="rect">
             <a:avLst/>
@@ -20792,7 +22887,7 @@
         <p:spPr>
           <a:xfrm>
             <a:off x="777240" y="2514600"/>
-            <a:ext cx="3218688" cy="1161288"/>
+            <a:ext cx="3218688" cy="1069848"/>
           </a:xfrm>
           <a:prstGeom prst="rect">
             <a:avLst/>
@@ -20847,7 +22942,7 @@
         <p:spPr>
           <a:xfrm>
             <a:off x="4297680" y="1737360"/>
-            <a:ext cx="3584448" cy="2029968"/>
+            <a:ext cx="3584448" cy="1938528"/>
           </a:xfrm>
           <a:prstGeom prst="roundRect">
             <a:avLst>
@@ -20892,7 +22987,7 @@
         <p:spPr>
           <a:xfrm>
             <a:off x="4297680" y="1737360"/>
-            <a:ext cx="54864" cy="2029968"/>
+            <a:ext cx="54864" cy="1938528"/>
           </a:xfrm>
           <a:prstGeom prst="rect">
             <a:avLst/>
@@ -20974,7 +23069,7 @@
         <p:spPr>
           <a:xfrm>
             <a:off x="4480560" y="2514600"/>
-            <a:ext cx="3218688" cy="1161288"/>
+            <a:ext cx="3218688" cy="1069848"/>
           </a:xfrm>
           <a:prstGeom prst="rect">
             <a:avLst/>
@@ -21029,7 +23124,7 @@
         <p:spPr>
           <a:xfrm>
             <a:off x="8001000" y="1737360"/>
-            <a:ext cx="3584448" cy="2029968"/>
+            <a:ext cx="3584448" cy="1938528"/>
           </a:xfrm>
           <a:prstGeom prst="roundRect">
             <a:avLst>
@@ -21074,7 +23169,7 @@
         <p:spPr>
           <a:xfrm>
             <a:off x="8001000" y="1737360"/>
-            <a:ext cx="54864" cy="2029968"/>
+            <a:ext cx="54864" cy="1938528"/>
           </a:xfrm>
           <a:prstGeom prst="rect">
             <a:avLst/>
@@ -21156,7 +23251,7 @@
         <p:spPr>
           <a:xfrm>
             <a:off x="8183879" y="2514600"/>
-            <a:ext cx="3218688" cy="1161288"/>
+            <a:ext cx="3218688" cy="1069848"/>
           </a:xfrm>
           <a:prstGeom prst="rect">
             <a:avLst/>
@@ -21210,8 +23305,8 @@
         </p:nvSpPr>
         <p:spPr>
           <a:xfrm>
-            <a:off x="640080" y="4206240"/>
-            <a:ext cx="10927080" cy="1133856"/>
+            <a:off x="640080" y="3959352"/>
+            <a:ext cx="10927080" cy="978408"/>
           </a:xfrm>
           <a:prstGeom prst="roundRect">
             <a:avLst>
@@ -21255,8 +23350,8 @@
         </p:nvSpPr>
         <p:spPr>
           <a:xfrm>
-            <a:off x="868680" y="4370832"/>
-            <a:ext cx="10469880" cy="731520"/>
+            <a:off x="868680" y="4123944"/>
+            <a:ext cx="10469880" cy="658368"/>
           </a:xfrm>
           <a:prstGeom prst="rect">
             <a:avLst/>
@@ -21294,8 +23389,47 @@
         </p:nvSpPr>
         <p:spPr>
           <a:xfrm>
-            <a:off x="731520" y="5596128"/>
-            <a:ext cx="10698480" cy="548640"/>
+            <a:off x="777240" y="5202936"/>
+            <a:ext cx="10607040" cy="539496"/>
+          </a:xfrm>
+          <a:prstGeom prst="rect">
+            <a:avLst/>
+          </a:prstGeom>
+          <a:noFill/>
+        </p:spPr>
+        <p:txBody>
+          <a:bodyPr wrap="square" lIns="27432" rIns="27432" tIns="18288" bIns="18288">
+            <a:spAutoFit/>
+          </a:bodyPr>
+          <a:lstStyle/>
+          <a:p>
+            <a:pPr algn="ctr">
+              <a:spcAft>
+                <a:spcPts val="500"/>
+              </a:spcAft>
+              <a:defRPr sz="2200" b="1">
+                <a:solidFill>
+                  <a:srgbClr val="008D91"/>
+                </a:solidFill>
+                <a:latin typeface="Arial"/>
+              </a:defRPr>
+            </a:pPr>
+            <a:r>
+              <a:t>A 35% capacity factor does not mean 65% of wind energy is wasted.</a:t>
+            </a:r>
+          </a:p>
+        </p:txBody>
+      </p:sp>
+      <p:sp>
+        <p:nvSpPr>
+          <p:cNvPr id="23" name="TextBox 22"/>
+          <p:cNvSpPr txBox="1"/>
+          <p:nvPr/>
+        </p:nvSpPr>
+        <p:spPr>
+          <a:xfrm>
+            <a:off x="731520" y="5852160"/>
+            <a:ext cx="10698480" cy="329184"/>
           </a:xfrm>
           <a:prstGeom prst="rect">
             <a:avLst/>
@@ -21312,7 +23446,7 @@
               <a:spcAft>
                 <a:spcPts val="500"/>
               </a:spcAft>
-              <a:defRPr sz="1700" b="0">
+              <a:defRPr sz="1400" b="0">
                 <a:solidFill>
                   <a:srgbClr val="5C6F7E"/>
                 </a:solidFill>
